--- a/output_pptx/Behold_Our_God.pptx
+++ b/output_pptx/Behold_Our_God.pptx
@@ -3124,23 +3124,23 @@
         </p:nvSpPr>
         <p:spPr>
           <a:xfrm>
-            <a:off x="594360" y="1837944"/>
-            <a:ext cx="11002975" cy="685800"/>
-          </a:xfrm>
-          <a:prstGeom prst="rect">
-            <a:avLst/>
-          </a:prstGeom>
-          <a:noFill/>
-        </p:spPr>
-        <p:txBody>
-          <a:bodyPr wrap="square">
-            <a:spAutoFit/>
-          </a:bodyPr>
-          <a:lstStyle/>
-          <a:p>
-            <a:pPr algn="ctr"/>
-            <a:r>
-              <a:rPr sz="4400" b="1" i="0">
+            <a:off x="640080" y="1650492"/>
+            <a:ext cx="10911535" cy="731520"/>
+          </a:xfrm>
+          <a:prstGeom prst="rect">
+            <a:avLst/>
+          </a:prstGeom>
+          <a:noFill/>
+        </p:spPr>
+        <p:txBody>
+          <a:bodyPr wrap="square">
+            <a:spAutoFit/>
+          </a:bodyPr>
+          <a:lstStyle/>
+          <a:p>
+            <a:pPr algn="ctr"/>
+            <a:r>
+              <a:rPr sz="4800" b="1" i="0">
                 <a:solidFill>
                   <a:srgbClr val="FFFFFF"/>
                 </a:solidFill>
@@ -3159,25 +3159,25 @@
         </p:nvSpPr>
         <p:spPr>
           <a:xfrm>
-            <a:off x="594360" y="2560320"/>
-            <a:ext cx="11002975" cy="384048"/>
-          </a:xfrm>
-          <a:prstGeom prst="rect">
-            <a:avLst/>
-          </a:prstGeom>
-          <a:noFill/>
-        </p:spPr>
-        <p:txBody>
-          <a:bodyPr wrap="square">
-            <a:spAutoFit/>
-          </a:bodyPr>
-          <a:lstStyle/>
-          <a:p>
-            <a:pPr algn="ctr"/>
-            <a:r>
-              <a:rPr sz="2240" b="0" i="1">
-                <a:solidFill>
-                  <a:srgbClr val="B4B4B4"/>
+            <a:off x="640080" y="2418588"/>
+            <a:ext cx="10911535" cy="365760"/>
+          </a:xfrm>
+          <a:prstGeom prst="rect">
+            <a:avLst/>
+          </a:prstGeom>
+          <a:noFill/>
+        </p:spPr>
+        <p:txBody>
+          <a:bodyPr wrap="square">
+            <a:spAutoFit/>
+          </a:bodyPr>
+          <a:lstStyle/>
+          <a:p>
+            <a:pPr algn="ctr"/>
+            <a:r>
+              <a:rPr sz="2400" b="0" i="1">
+                <a:solidFill>
+                  <a:srgbClr val="AAAAAA"/>
                 </a:solidFill>
                 <a:latin typeface="Arial"/>
               </a:rPr>
@@ -3194,8 +3194,78 @@
         </p:nvSpPr>
         <p:spPr>
           <a:xfrm>
-            <a:off x="594360" y="2980944"/>
-            <a:ext cx="11002975" cy="347472"/>
+            <a:off x="640080" y="2985516"/>
+            <a:ext cx="10911535" cy="731520"/>
+          </a:xfrm>
+          <a:prstGeom prst="rect">
+            <a:avLst/>
+          </a:prstGeom>
+          <a:noFill/>
+        </p:spPr>
+        <p:txBody>
+          <a:bodyPr wrap="square">
+            <a:spAutoFit/>
+          </a:bodyPr>
+          <a:lstStyle/>
+          <a:p>
+            <a:pPr algn="ctr"/>
+            <a:r>
+              <a:rPr sz="4800" b="1" i="0">
+                <a:solidFill>
+                  <a:srgbClr val="FFFFFF"/>
+                </a:solidFill>
+                <a:latin typeface="Arial"/>
+              </a:rPr>
+              <a:t>全地が主を恐れ喜び声上げる</a:t>
+            </a:r>
+          </a:p>
+        </p:txBody>
+      </p:sp>
+      <p:sp>
+        <p:nvSpPr>
+          <p:cNvPr id="5" name="TextBox 4"/>
+          <p:cNvSpPr txBox="1"/>
+          <p:nvPr/>
+        </p:nvSpPr>
+        <p:spPr>
+          <a:xfrm>
+            <a:off x="640080" y="3753612"/>
+            <a:ext cx="10911535" cy="365760"/>
+          </a:xfrm>
+          <a:prstGeom prst="rect">
+            <a:avLst/>
+          </a:prstGeom>
+          <a:noFill/>
+        </p:spPr>
+        <p:txBody>
+          <a:bodyPr wrap="square">
+            <a:spAutoFit/>
+          </a:bodyPr>
+          <a:lstStyle/>
+          <a:p>
+            <a:pPr algn="ctr"/>
+            <a:r>
+              <a:rPr sz="2400" b="0" i="1">
+                <a:solidFill>
+                  <a:srgbClr val="AAAAAA"/>
+                </a:solidFill>
+                <a:latin typeface="Arial"/>
+              </a:rPr>
+              <a:t>zenchi ga shu wo osore yorokobi koe ageru</a:t>
+            </a:r>
+          </a:p>
+        </p:txBody>
+      </p:sp>
+      <p:sp>
+        <p:nvSpPr>
+          <p:cNvPr id="6" name="TextBox 5"/>
+          <p:cNvSpPr txBox="1"/>
+          <p:nvPr/>
+        </p:nvSpPr>
+        <p:spPr>
+          <a:xfrm>
+            <a:off x="640080" y="4530852"/>
+            <a:ext cx="10911535" cy="310896"/>
           </a:xfrm>
           <a:prstGeom prst="rect">
             <a:avLst/>
@@ -3212,81 +3282,11 @@
             <a:r>
               <a:rPr sz="2000" b="0" i="1">
                 <a:solidFill>
-                  <a:srgbClr val="8C8C8C"/>
-                </a:solidFill>
-                <a:latin typeface="Arial"/>
-              </a:rPr>
-              <a:t/>
-            </a:r>
-          </a:p>
-        </p:txBody>
-      </p:sp>
-      <p:sp>
-        <p:nvSpPr>
-          <p:cNvPr id="5" name="TextBox 4"/>
-          <p:cNvSpPr txBox="1"/>
-          <p:nvPr/>
-        </p:nvSpPr>
-        <p:spPr>
-          <a:xfrm>
-            <a:off x="594360" y="3529584"/>
-            <a:ext cx="11002975" cy="685800"/>
-          </a:xfrm>
-          <a:prstGeom prst="rect">
-            <a:avLst/>
-          </a:prstGeom>
-          <a:noFill/>
-        </p:spPr>
-        <p:txBody>
-          <a:bodyPr wrap="square">
-            <a:spAutoFit/>
-          </a:bodyPr>
-          <a:lstStyle/>
-          <a:p>
-            <a:pPr algn="ctr"/>
-            <a:r>
-              <a:rPr sz="4400" b="1" i="0">
-                <a:solidFill>
-                  <a:srgbClr val="FFFFFF"/>
-                </a:solidFill>
-                <a:latin typeface="Arial"/>
-              </a:rPr>
-              <a:t>全地が主を恐れ喜び声上げる</a:t>
-            </a:r>
-          </a:p>
-        </p:txBody>
-      </p:sp>
-      <p:sp>
-        <p:nvSpPr>
-          <p:cNvPr id="6" name="TextBox 5"/>
-          <p:cNvSpPr txBox="1"/>
-          <p:nvPr/>
-        </p:nvSpPr>
-        <p:spPr>
-          <a:xfrm>
-            <a:off x="594360" y="4251960"/>
-            <a:ext cx="11002975" cy="384048"/>
-          </a:xfrm>
-          <a:prstGeom prst="rect">
-            <a:avLst/>
-          </a:prstGeom>
-          <a:noFill/>
-        </p:spPr>
-        <p:txBody>
-          <a:bodyPr wrap="square">
-            <a:spAutoFit/>
-          </a:bodyPr>
-          <a:lstStyle/>
-          <a:p>
-            <a:pPr algn="ctr"/>
-            <a:r>
-              <a:rPr sz="2400" b="0" i="1">
-                <a:solidFill>
-                  <a:srgbClr val="B4B4B4"/>
-                </a:solidFill>
-                <a:latin typeface="Arial"/>
-              </a:rPr>
-              <a:t>zenchi ga shu wo osore yorokobi koe ageru</a:t>
+                  <a:srgbClr val="828282"/>
+                </a:solidFill>
+                <a:latin typeface="Arial"/>
+              </a:rPr>
+              <a:t>Quem tomou o mar em suas mãos?</a:t>
             </a:r>
           </a:p>
         </p:txBody>
@@ -3299,8 +3299,8 @@
         </p:nvSpPr>
         <p:spPr>
           <a:xfrm>
-            <a:off x="594360" y="4672584"/>
-            <a:ext cx="11002975" cy="347472"/>
+            <a:off x="640080" y="4896612"/>
+            <a:ext cx="10911535" cy="310896"/>
           </a:xfrm>
           <a:prstGeom prst="rect">
             <a:avLst/>
@@ -3317,11 +3317,11 @@
             <a:r>
               <a:rPr sz="2000" b="0" i="1">
                 <a:solidFill>
-                  <a:srgbClr val="8C8C8C"/>
-                </a:solidFill>
-                <a:latin typeface="Arial"/>
-              </a:rPr>
-              <a:t/>
+                  <a:srgbClr val="828282"/>
+                </a:solidFill>
+                <a:latin typeface="Arial"/>
+              </a:rPr>
+              <a:t>Quem contou da areia cada grão?</a:t>
             </a:r>
           </a:p>
         </p:txBody>
@@ -3360,23 +3360,23 @@
         </p:nvSpPr>
         <p:spPr>
           <a:xfrm>
-            <a:off x="594360" y="1837944"/>
-            <a:ext cx="11002975" cy="685800"/>
-          </a:xfrm>
-          <a:prstGeom prst="rect">
-            <a:avLst/>
-          </a:prstGeom>
-          <a:noFill/>
-        </p:spPr>
-        <p:txBody>
-          <a:bodyPr wrap="square">
-            <a:spAutoFit/>
-          </a:bodyPr>
-          <a:lstStyle/>
-          <a:p>
-            <a:pPr algn="ctr"/>
-            <a:r>
-              <a:rPr sz="4400" b="1" i="0">
+            <a:off x="640080" y="1650492"/>
+            <a:ext cx="10911535" cy="731520"/>
+          </a:xfrm>
+          <a:prstGeom prst="rect">
+            <a:avLst/>
+          </a:prstGeom>
+          <a:noFill/>
+        </p:spPr>
+        <p:txBody>
+          <a:bodyPr wrap="square">
+            <a:spAutoFit/>
+          </a:bodyPr>
+          <a:lstStyle/>
+          <a:p>
+            <a:pPr algn="ctr"/>
+            <a:r>
+              <a:rPr sz="4800" b="1" i="0">
                 <a:solidFill>
                   <a:srgbClr val="FFFFFF"/>
                 </a:solidFill>
@@ -3395,8 +3395,8 @@
         </p:nvSpPr>
         <p:spPr>
           <a:xfrm>
-            <a:off x="594360" y="2560320"/>
-            <a:ext cx="11002975" cy="384048"/>
+            <a:off x="640080" y="2418588"/>
+            <a:ext cx="10911535" cy="365760"/>
           </a:xfrm>
           <a:prstGeom prst="rect">
             <a:avLst/>
@@ -3413,7 +3413,7 @@
             <a:r>
               <a:rPr sz="2400" b="0" i="1">
                 <a:solidFill>
-                  <a:srgbClr val="B4B4B4"/>
+                  <a:srgbClr val="AAAAAA"/>
                 </a:solidFill>
                 <a:latin typeface="Arial"/>
               </a:rPr>
@@ -3430,8 +3430,78 @@
         </p:nvSpPr>
         <p:spPr>
           <a:xfrm>
-            <a:off x="594360" y="2980944"/>
-            <a:ext cx="11002975" cy="347472"/>
+            <a:off x="640080" y="2985516"/>
+            <a:ext cx="10911535" cy="731520"/>
+          </a:xfrm>
+          <a:prstGeom prst="rect">
+            <a:avLst/>
+          </a:prstGeom>
+          <a:noFill/>
+        </p:spPr>
+        <p:txBody>
+          <a:bodyPr wrap="square">
+            <a:spAutoFit/>
+          </a:bodyPr>
+          <a:lstStyle/>
+          <a:p>
+            <a:pPr algn="ctr"/>
+            <a:r>
+              <a:rPr sz="4800" b="1" i="0">
+                <a:solidFill>
+                  <a:srgbClr val="FFFFFF"/>
+                </a:solidFill>
+                <a:latin typeface="Arial"/>
+              </a:rPr>
+              <a:t>永遠(とわ)のかみが墓に</a:t>
+            </a:r>
+          </a:p>
+        </p:txBody>
+      </p:sp>
+      <p:sp>
+        <p:nvSpPr>
+          <p:cNvPr id="5" name="TextBox 4"/>
+          <p:cNvSpPr txBox="1"/>
+          <p:nvPr/>
+        </p:nvSpPr>
+        <p:spPr>
+          <a:xfrm>
+            <a:off x="640080" y="3753612"/>
+            <a:ext cx="10911535" cy="365760"/>
+          </a:xfrm>
+          <a:prstGeom prst="rect">
+            <a:avLst/>
+          </a:prstGeom>
+          <a:noFill/>
+        </p:spPr>
+        <p:txBody>
+          <a:bodyPr wrap="square">
+            <a:spAutoFit/>
+          </a:bodyPr>
+          <a:lstStyle/>
+          <a:p>
+            <a:pPr algn="ctr"/>
+            <a:r>
+              <a:rPr sz="2400" b="0" i="1">
+                <a:solidFill>
+                  <a:srgbClr val="AAAAAA"/>
+                </a:solidFill>
+                <a:latin typeface="Arial"/>
+              </a:rPr>
+              <a:t>towa no kami ga haka ni</a:t>
+            </a:r>
+          </a:p>
+        </p:txBody>
+      </p:sp>
+      <p:sp>
+        <p:nvSpPr>
+          <p:cNvPr id="6" name="TextBox 5"/>
+          <p:cNvSpPr txBox="1"/>
+          <p:nvPr/>
+        </p:nvSpPr>
+        <p:spPr>
+          <a:xfrm>
+            <a:off x="640080" y="4530852"/>
+            <a:ext cx="10911535" cy="310896"/>
           </a:xfrm>
           <a:prstGeom prst="rect">
             <a:avLst/>
@@ -3448,81 +3518,11 @@
             <a:r>
               <a:rPr sz="2000" b="0" i="1">
                 <a:solidFill>
-                  <a:srgbClr val="8C8C8C"/>
-                </a:solidFill>
-                <a:latin typeface="Arial"/>
-              </a:rPr>
-              <a:t/>
-            </a:r>
-          </a:p>
-        </p:txBody>
-      </p:sp>
-      <p:sp>
-        <p:nvSpPr>
-          <p:cNvPr id="5" name="TextBox 4"/>
-          <p:cNvSpPr txBox="1"/>
-          <p:nvPr/>
-        </p:nvSpPr>
-        <p:spPr>
-          <a:xfrm>
-            <a:off x="594360" y="3529584"/>
-            <a:ext cx="11002975" cy="685800"/>
-          </a:xfrm>
-          <a:prstGeom prst="rect">
-            <a:avLst/>
-          </a:prstGeom>
-          <a:noFill/>
-        </p:spPr>
-        <p:txBody>
-          <a:bodyPr wrap="square">
-            <a:spAutoFit/>
-          </a:bodyPr>
-          <a:lstStyle/>
-          <a:p>
-            <a:pPr algn="ctr"/>
-            <a:r>
-              <a:rPr sz="4400" b="1" i="0">
-                <a:solidFill>
-                  <a:srgbClr val="FFFFFF"/>
-                </a:solidFill>
-                <a:latin typeface="Arial"/>
-              </a:rPr>
-              <a:t>永遠(とわ)のかみが墓に</a:t>
-            </a:r>
-          </a:p>
-        </p:txBody>
-      </p:sp>
-      <p:sp>
-        <p:nvSpPr>
-          <p:cNvPr id="6" name="TextBox 5"/>
-          <p:cNvSpPr txBox="1"/>
-          <p:nvPr/>
-        </p:nvSpPr>
-        <p:spPr>
-          <a:xfrm>
-            <a:off x="594360" y="4251960"/>
-            <a:ext cx="11002975" cy="384048"/>
-          </a:xfrm>
-          <a:prstGeom prst="rect">
-            <a:avLst/>
-          </a:prstGeom>
-          <a:noFill/>
-        </p:spPr>
-        <p:txBody>
-          <a:bodyPr wrap="square">
-            <a:spAutoFit/>
-          </a:bodyPr>
-          <a:lstStyle/>
-          <a:p>
-            <a:pPr algn="ctr"/>
-            <a:r>
-              <a:rPr sz="2400" b="0" i="1">
-                <a:solidFill>
-                  <a:srgbClr val="B4B4B4"/>
-                </a:solidFill>
-                <a:latin typeface="Arial"/>
-              </a:rPr>
-              <a:t>towa no kami ga haka ni</a:t>
+                  <a:srgbClr val="828282"/>
+                </a:solidFill>
+                <a:latin typeface="Arial"/>
+              </a:rPr>
+              <a:t>Quem tomou o mar em suas mãos?</a:t>
             </a:r>
           </a:p>
         </p:txBody>
@@ -3535,8 +3535,8 @@
         </p:nvSpPr>
         <p:spPr>
           <a:xfrm>
-            <a:off x="594360" y="4672584"/>
-            <a:ext cx="11002975" cy="347472"/>
+            <a:off x="640080" y="4896612"/>
+            <a:ext cx="10911535" cy="310896"/>
           </a:xfrm>
           <a:prstGeom prst="rect">
             <a:avLst/>
@@ -3553,11 +3553,11 @@
             <a:r>
               <a:rPr sz="2000" b="0" i="1">
                 <a:solidFill>
-                  <a:srgbClr val="8C8C8C"/>
-                </a:solidFill>
-                <a:latin typeface="Arial"/>
-              </a:rPr>
-              <a:t/>
+                  <a:srgbClr val="828282"/>
+                </a:solidFill>
+                <a:latin typeface="Arial"/>
+              </a:rPr>
+              <a:t>Quem contou da areia cada grão?</a:t>
             </a:r>
           </a:p>
         </p:txBody>
@@ -3596,23 +3596,23 @@
         </p:nvSpPr>
         <p:spPr>
           <a:xfrm>
-            <a:off x="594360" y="2683764"/>
-            <a:ext cx="11002975" cy="685800"/>
-          </a:xfrm>
-          <a:prstGeom prst="rect">
-            <a:avLst/>
-          </a:prstGeom>
-          <a:noFill/>
-        </p:spPr>
-        <p:txBody>
-          <a:bodyPr wrap="square">
-            <a:spAutoFit/>
-          </a:bodyPr>
-          <a:lstStyle/>
-          <a:p>
-            <a:pPr algn="ctr"/>
-            <a:r>
-              <a:rPr sz="4400" b="1" i="0">
+            <a:off x="640080" y="2500884"/>
+            <a:ext cx="10911535" cy="731520"/>
+          </a:xfrm>
+          <a:prstGeom prst="rect">
+            <a:avLst/>
+          </a:prstGeom>
+          <a:noFill/>
+        </p:spPr>
+        <p:txBody>
+          <a:bodyPr wrap="square">
+            <a:spAutoFit/>
+          </a:bodyPr>
+          <a:lstStyle/>
+          <a:p>
+            <a:pPr algn="ctr"/>
+            <a:r>
+              <a:rPr sz="4800" b="1" i="0">
                 <a:solidFill>
                   <a:srgbClr val="FFFFFF"/>
                 </a:solidFill>
@@ -3631,8 +3631,8 @@
         </p:nvSpPr>
         <p:spPr>
           <a:xfrm>
-            <a:off x="594360" y="3406140"/>
-            <a:ext cx="11002975" cy="384048"/>
+            <a:off x="640080" y="3268980"/>
+            <a:ext cx="10911535" cy="365760"/>
           </a:xfrm>
           <a:prstGeom prst="rect">
             <a:avLst/>
@@ -3649,7 +3649,7 @@
             <a:r>
               <a:rPr sz="2400" b="0" i="1">
                 <a:solidFill>
-                  <a:srgbClr val="B4B4B4"/>
+                  <a:srgbClr val="AAAAAA"/>
                 </a:solidFill>
                 <a:latin typeface="Arial"/>
               </a:rPr>
@@ -3666,8 +3666,8 @@
         </p:nvSpPr>
         <p:spPr>
           <a:xfrm>
-            <a:off x="594360" y="3826764"/>
-            <a:ext cx="11002975" cy="347472"/>
+            <a:off x="640080" y="4046220"/>
+            <a:ext cx="10911535" cy="310896"/>
           </a:xfrm>
           <a:prstGeom prst="rect">
             <a:avLst/>
@@ -3684,11 +3684,11 @@
             <a:r>
               <a:rPr sz="2000" b="0" i="1">
                 <a:solidFill>
-                  <a:srgbClr val="8C8C8C"/>
-                </a:solidFill>
-                <a:latin typeface="Arial"/>
-              </a:rPr>
-              <a:t/>
+                  <a:srgbClr val="828282"/>
+                </a:solidFill>
+                <a:latin typeface="Arial"/>
+              </a:rPr>
+              <a:t>Tremem reis, nações, ao ouvir sua voz</a:t>
             </a:r>
           </a:p>
         </p:txBody>
@@ -3727,23 +3727,23 @@
         </p:nvSpPr>
         <p:spPr>
           <a:xfrm>
-            <a:off x="594360" y="1837944"/>
-            <a:ext cx="11002975" cy="685800"/>
-          </a:xfrm>
-          <a:prstGeom prst="rect">
-            <a:avLst/>
-          </a:prstGeom>
-          <a:noFill/>
-        </p:spPr>
-        <p:txBody>
-          <a:bodyPr wrap="square">
-            <a:spAutoFit/>
-          </a:bodyPr>
-          <a:lstStyle/>
-          <a:p>
-            <a:pPr algn="ctr"/>
-            <a:r>
-              <a:rPr sz="4400" b="1" i="0">
+            <a:off x="640080" y="1650492"/>
+            <a:ext cx="10911535" cy="731520"/>
+          </a:xfrm>
+          <a:prstGeom prst="rect">
+            <a:avLst/>
+          </a:prstGeom>
+          <a:noFill/>
+        </p:spPr>
+        <p:txBody>
+          <a:bodyPr wrap="square">
+            <a:spAutoFit/>
+          </a:bodyPr>
+          <a:lstStyle/>
+          <a:p>
+            <a:pPr algn="ctr"/>
+            <a:r>
+              <a:rPr sz="4800" b="1" i="0">
                 <a:solidFill>
                   <a:srgbClr val="FFFFFF"/>
                 </a:solidFill>
@@ -3762,8 +3762,8 @@
         </p:nvSpPr>
         <p:spPr>
           <a:xfrm>
-            <a:off x="594360" y="2560320"/>
-            <a:ext cx="11002975" cy="384048"/>
+            <a:off x="640080" y="2418588"/>
+            <a:ext cx="10911535" cy="365760"/>
           </a:xfrm>
           <a:prstGeom prst="rect">
             <a:avLst/>
@@ -3780,7 +3780,7 @@
             <a:r>
               <a:rPr sz="2400" b="0" i="1">
                 <a:solidFill>
-                  <a:srgbClr val="B4B4B4"/>
+                  <a:srgbClr val="AAAAAA"/>
                 </a:solidFill>
                 <a:latin typeface="Arial"/>
               </a:rPr>
@@ -3797,8 +3797,78 @@
         </p:nvSpPr>
         <p:spPr>
           <a:xfrm>
-            <a:off x="594360" y="2980944"/>
-            <a:ext cx="11002975" cy="347472"/>
+            <a:off x="640080" y="2985516"/>
+            <a:ext cx="10911535" cy="731520"/>
+          </a:xfrm>
+          <a:prstGeom prst="rect">
+            <a:avLst/>
+          </a:prstGeom>
+          <a:noFill/>
+        </p:spPr>
+        <p:txBody>
+          <a:bodyPr wrap="square">
+            <a:spAutoFit/>
+          </a:bodyPr>
+          <a:lstStyle/>
+          <a:p>
+            <a:pPr algn="ctr"/>
+            <a:r>
+              <a:rPr sz="4800" b="1" i="0">
+                <a:solidFill>
+                  <a:srgbClr val="FFFFFF"/>
+                </a:solidFill>
+                <a:latin typeface="Arial"/>
+              </a:rPr>
+              <a:t>見上げよう イエスの御名</a:t>
+            </a:r>
+          </a:p>
+        </p:txBody>
+      </p:sp>
+      <p:sp>
+        <p:nvSpPr>
+          <p:cNvPr id="5" name="TextBox 4"/>
+          <p:cNvSpPr txBox="1"/>
+          <p:nvPr/>
+        </p:nvSpPr>
+        <p:spPr>
+          <a:xfrm>
+            <a:off x="640080" y="3753612"/>
+            <a:ext cx="10911535" cy="365760"/>
+          </a:xfrm>
+          <a:prstGeom prst="rect">
+            <a:avLst/>
+          </a:prstGeom>
+          <a:noFill/>
+        </p:spPr>
+        <p:txBody>
+          <a:bodyPr wrap="square">
+            <a:spAutoFit/>
+          </a:bodyPr>
+          <a:lstStyle/>
+          <a:p>
+            <a:pPr algn="ctr"/>
+            <a:r>
+              <a:rPr sz="2400" b="0" i="1">
+                <a:solidFill>
+                  <a:srgbClr val="AAAAAA"/>
+                </a:solidFill>
+                <a:latin typeface="Arial"/>
+              </a:rPr>
+              <a:t>miageyo iesu no mina</a:t>
+            </a:r>
+          </a:p>
+        </p:txBody>
+      </p:sp>
+      <p:sp>
+        <p:nvSpPr>
+          <p:cNvPr id="6" name="TextBox 5"/>
+          <p:cNvSpPr txBox="1"/>
+          <p:nvPr/>
+        </p:nvSpPr>
+        <p:spPr>
+          <a:xfrm>
+            <a:off x="640080" y="4530852"/>
+            <a:ext cx="10911535" cy="310896"/>
           </a:xfrm>
           <a:prstGeom prst="rect">
             <a:avLst/>
@@ -3815,81 +3885,11 @@
             <a:r>
               <a:rPr sz="2000" b="0" i="1">
                 <a:solidFill>
-                  <a:srgbClr val="8C8C8C"/>
-                </a:solidFill>
-                <a:latin typeface="Arial"/>
-              </a:rPr>
-              <a:t/>
-            </a:r>
-          </a:p>
-        </p:txBody>
-      </p:sp>
-      <p:sp>
-        <p:nvSpPr>
-          <p:cNvPr id="5" name="TextBox 4"/>
-          <p:cNvSpPr txBox="1"/>
-          <p:nvPr/>
-        </p:nvSpPr>
-        <p:spPr>
-          <a:xfrm>
-            <a:off x="594360" y="3529584"/>
-            <a:ext cx="11002975" cy="685800"/>
-          </a:xfrm>
-          <a:prstGeom prst="rect">
-            <a:avLst/>
-          </a:prstGeom>
-          <a:noFill/>
-        </p:spPr>
-        <p:txBody>
-          <a:bodyPr wrap="square">
-            <a:spAutoFit/>
-          </a:bodyPr>
-          <a:lstStyle/>
-          <a:p>
-            <a:pPr algn="ctr"/>
-            <a:r>
-              <a:rPr sz="4400" b="1" i="0">
-                <a:solidFill>
-                  <a:srgbClr val="FFFFFF"/>
-                </a:solidFill>
-                <a:latin typeface="Arial"/>
-              </a:rPr>
-              <a:t>見上げよう イエスの御名</a:t>
-            </a:r>
-          </a:p>
-        </p:txBody>
-      </p:sp>
-      <p:sp>
-        <p:nvSpPr>
-          <p:cNvPr id="6" name="TextBox 5"/>
-          <p:cNvSpPr txBox="1"/>
-          <p:nvPr/>
-        </p:nvSpPr>
-        <p:spPr>
-          <a:xfrm>
-            <a:off x="594360" y="4251960"/>
-            <a:ext cx="11002975" cy="384048"/>
-          </a:xfrm>
-          <a:prstGeom prst="rect">
-            <a:avLst/>
-          </a:prstGeom>
-          <a:noFill/>
-        </p:spPr>
-        <p:txBody>
-          <a:bodyPr wrap="square">
-            <a:spAutoFit/>
-          </a:bodyPr>
-          <a:lstStyle/>
-          <a:p>
-            <a:pPr algn="ctr"/>
-            <a:r>
-              <a:rPr sz="2400" b="0" i="1">
-                <a:solidFill>
-                  <a:srgbClr val="B4B4B4"/>
-                </a:solidFill>
-                <a:latin typeface="Arial"/>
-              </a:rPr>
-              <a:t>miageyo iesu no mina</a:t>
+                  <a:srgbClr val="828282"/>
+                </a:solidFill>
+                <a:latin typeface="Arial"/>
+              </a:rPr>
+              <a:t>Eis nosso Deus, no trono a reinar</a:t>
             </a:r>
           </a:p>
         </p:txBody>
@@ -3902,8 +3902,8 @@
         </p:nvSpPr>
         <p:spPr>
           <a:xfrm>
-            <a:off x="594360" y="4672584"/>
-            <a:ext cx="11002975" cy="347472"/>
+            <a:off x="640080" y="4896612"/>
+            <a:ext cx="10911535" cy="310896"/>
           </a:xfrm>
           <a:prstGeom prst="rect">
             <a:avLst/>
@@ -3920,11 +3920,11 @@
             <a:r>
               <a:rPr sz="2000" b="0" i="1">
                 <a:solidFill>
-                  <a:srgbClr val="8C8C8C"/>
-                </a:solidFill>
-                <a:latin typeface="Arial"/>
-              </a:rPr>
-              <a:t/>
+                  <a:srgbClr val="828282"/>
+                </a:solidFill>
+                <a:latin typeface="Arial"/>
+              </a:rPr>
+              <a:t>Vinde, adoremos</a:t>
             </a:r>
           </a:p>
         </p:txBody>
@@ -3963,23 +3963,23 @@
         </p:nvSpPr>
         <p:spPr>
           <a:xfrm>
-            <a:off x="594360" y="2683764"/>
-            <a:ext cx="11002975" cy="685800"/>
-          </a:xfrm>
-          <a:prstGeom prst="rect">
-            <a:avLst/>
-          </a:prstGeom>
-          <a:noFill/>
-        </p:spPr>
-        <p:txBody>
-          <a:bodyPr wrap="square">
-            <a:spAutoFit/>
-          </a:bodyPr>
-          <a:lstStyle/>
-          <a:p>
-            <a:pPr algn="ctr"/>
-            <a:r>
-              <a:rPr sz="4400" b="1" i="0">
+            <a:off x="640080" y="2500884"/>
+            <a:ext cx="10911535" cy="731520"/>
+          </a:xfrm>
+          <a:prstGeom prst="rect">
+            <a:avLst/>
+          </a:prstGeom>
+          <a:noFill/>
+        </p:spPr>
+        <p:txBody>
+          <a:bodyPr wrap="square">
+            <a:spAutoFit/>
+          </a:bodyPr>
+          <a:lstStyle/>
+          <a:p>
+            <a:pPr algn="ctr"/>
+            <a:r>
+              <a:rPr sz="4800" b="1" i="0">
                 <a:solidFill>
                   <a:srgbClr val="FFFFFF"/>
                 </a:solidFill>
@@ -3998,8 +3998,8 @@
         </p:nvSpPr>
         <p:spPr>
           <a:xfrm>
-            <a:off x="594360" y="3406140"/>
-            <a:ext cx="11002975" cy="384048"/>
+            <a:off x="640080" y="3268980"/>
+            <a:ext cx="10911535" cy="365760"/>
           </a:xfrm>
           <a:prstGeom prst="rect">
             <a:avLst/>
@@ -4016,7 +4016,7 @@
             <a:r>
               <a:rPr sz="2400" b="0" i="1">
                 <a:solidFill>
-                  <a:srgbClr val="B4B4B4"/>
+                  <a:srgbClr val="AAAAAA"/>
                 </a:solidFill>
                 <a:latin typeface="Arial"/>
               </a:rPr>
@@ -4033,8 +4033,8 @@
         </p:nvSpPr>
         <p:spPr>
           <a:xfrm>
-            <a:off x="594360" y="3826764"/>
-            <a:ext cx="11002975" cy="347472"/>
+            <a:off x="640080" y="4046220"/>
+            <a:ext cx="10911535" cy="310896"/>
           </a:xfrm>
           <a:prstGeom prst="rect">
             <a:avLst/>
@@ -4051,11 +4051,11 @@
             <a:r>
               <a:rPr sz="2000" b="0" i="1">
                 <a:solidFill>
-                  <a:srgbClr val="8C8C8C"/>
-                </a:solidFill>
-                <a:latin typeface="Arial"/>
-              </a:rPr>
-              <a:t/>
+                  <a:srgbClr val="828282"/>
+                </a:solidFill>
+                <a:latin typeface="Arial"/>
+              </a:rPr>
+              <a:t>Eis nosso Rei: incomparável é</a:t>
             </a:r>
           </a:p>
         </p:txBody>
@@ -4094,23 +4094,23 @@
         </p:nvSpPr>
         <p:spPr>
           <a:xfrm>
-            <a:off x="594360" y="2258568"/>
-            <a:ext cx="11002975" cy="685800"/>
-          </a:xfrm>
-          <a:prstGeom prst="rect">
-            <a:avLst/>
-          </a:prstGeom>
-          <a:noFill/>
-        </p:spPr>
-        <p:txBody>
-          <a:bodyPr wrap="square">
-            <a:spAutoFit/>
-          </a:bodyPr>
-          <a:lstStyle/>
-          <a:p>
-            <a:pPr algn="ctr"/>
-            <a:r>
-              <a:rPr sz="4400" b="1" i="0">
+            <a:off x="640080" y="2052828"/>
+            <a:ext cx="10911535" cy="731520"/>
+          </a:xfrm>
+          <a:prstGeom prst="rect">
+            <a:avLst/>
+          </a:prstGeom>
+          <a:noFill/>
+        </p:spPr>
+        <p:txBody>
+          <a:bodyPr wrap="square">
+            <a:spAutoFit/>
+          </a:bodyPr>
+          <a:lstStyle/>
+          <a:p>
+            <a:pPr algn="ctr"/>
+            <a:r>
+              <a:rPr sz="4800" b="1" i="0">
                 <a:solidFill>
                   <a:srgbClr val="FFFFFF"/>
                 </a:solidFill>
@@ -4129,99 +4129,29 @@
         </p:nvSpPr>
         <p:spPr>
           <a:xfrm>
-            <a:off x="594360" y="2980944"/>
-            <a:ext cx="11002975" cy="347472"/>
-          </a:xfrm>
-          <a:prstGeom prst="rect">
-            <a:avLst/>
-          </a:prstGeom>
-          <a:noFill/>
-        </p:spPr>
-        <p:txBody>
-          <a:bodyPr wrap="square">
-            <a:spAutoFit/>
-          </a:bodyPr>
-          <a:lstStyle/>
-          <a:p>
-            <a:pPr algn="ctr"/>
-            <a:r>
-              <a:rPr sz="2200" b="0" i="1">
-                <a:solidFill>
-                  <a:srgbClr val="8C8C8C"/>
-                </a:solidFill>
-                <a:latin typeface="Arial"/>
-              </a:rPr>
-              <a:t/>
-            </a:r>
-          </a:p>
-        </p:txBody>
-      </p:sp>
-      <p:sp>
-        <p:nvSpPr>
-          <p:cNvPr id="4" name="TextBox 3"/>
-          <p:cNvSpPr txBox="1"/>
-          <p:nvPr/>
-        </p:nvSpPr>
-        <p:spPr>
-          <a:xfrm>
-            <a:off x="594360" y="3529584"/>
-            <a:ext cx="11002975" cy="685800"/>
-          </a:xfrm>
-          <a:prstGeom prst="rect">
-            <a:avLst/>
-          </a:prstGeom>
-          <a:noFill/>
-        </p:spPr>
-        <p:txBody>
-          <a:bodyPr wrap="square">
-            <a:spAutoFit/>
-          </a:bodyPr>
-          <a:lstStyle/>
-          <a:p>
-            <a:pPr algn="ctr"/>
-            <a:r>
-              <a:rPr sz="4400" b="1" i="0">
+            <a:off x="640080" y="2985516"/>
+            <a:ext cx="10911535" cy="731520"/>
+          </a:xfrm>
+          <a:prstGeom prst="rect">
+            <a:avLst/>
+          </a:prstGeom>
+          <a:noFill/>
+        </p:spPr>
+        <p:txBody>
+          <a:bodyPr wrap="square">
+            <a:spAutoFit/>
+          </a:bodyPr>
+          <a:lstStyle/>
+          <a:p>
+            <a:pPr algn="ctr"/>
+            <a:r>
+              <a:rPr sz="4800" b="1" i="0">
                 <a:solidFill>
                   <a:srgbClr val="FFFFFF"/>
                 </a:solidFill>
                 <a:latin typeface="Arial"/>
               </a:rPr>
               <a:t>Quem vai lhe ensinar?</a:t>
-            </a:r>
-          </a:p>
-        </p:txBody>
-      </p:sp>
-      <p:sp>
-        <p:nvSpPr>
-          <p:cNvPr id="5" name="TextBox 4"/>
-          <p:cNvSpPr txBox="1"/>
-          <p:nvPr/>
-        </p:nvSpPr>
-        <p:spPr>
-          <a:xfrm>
-            <a:off x="594360" y="4251960"/>
-            <a:ext cx="11002975" cy="347472"/>
-          </a:xfrm>
-          <a:prstGeom prst="rect">
-            <a:avLst/>
-          </a:prstGeom>
-          <a:noFill/>
-        </p:spPr>
-        <p:txBody>
-          <a:bodyPr wrap="square">
-            <a:spAutoFit/>
-          </a:bodyPr>
-          <a:lstStyle/>
-          <a:p>
-            <a:pPr algn="ctr"/>
-            <a:r>
-              <a:rPr sz="2200" b="0" i="1">
-                <a:solidFill>
-                  <a:srgbClr val="8C8C8C"/>
-                </a:solidFill>
-                <a:latin typeface="Arial"/>
-              </a:rPr>
-              <a:t/>
             </a:r>
           </a:p>
         </p:txBody>
@@ -4260,23 +4190,23 @@
         </p:nvSpPr>
         <p:spPr>
           <a:xfrm>
-            <a:off x="594360" y="2258568"/>
-            <a:ext cx="11002975" cy="685800"/>
-          </a:xfrm>
-          <a:prstGeom prst="rect">
-            <a:avLst/>
-          </a:prstGeom>
-          <a:noFill/>
-        </p:spPr>
-        <p:txBody>
-          <a:bodyPr wrap="square">
-            <a:spAutoFit/>
-          </a:bodyPr>
-          <a:lstStyle/>
-          <a:p>
-            <a:pPr algn="ctr"/>
-            <a:r>
-              <a:rPr sz="4266" b="1" i="0">
+            <a:off x="640080" y="2052828"/>
+            <a:ext cx="10911535" cy="731520"/>
+          </a:xfrm>
+          <a:prstGeom prst="rect">
+            <a:avLst/>
+          </a:prstGeom>
+          <a:noFill/>
+        </p:spPr>
+        <p:txBody>
+          <a:bodyPr wrap="square">
+            <a:spAutoFit/>
+          </a:bodyPr>
+          <a:lstStyle/>
+          <a:p>
+            <a:pPr algn="ctr"/>
+            <a:r>
+              <a:rPr sz="4600" b="1" i="0">
                 <a:solidFill>
                   <a:srgbClr val="FFFFFF"/>
                 </a:solidFill>
@@ -4295,99 +4225,29 @@
         </p:nvSpPr>
         <p:spPr>
           <a:xfrm>
-            <a:off x="594360" y="2980944"/>
-            <a:ext cx="11002975" cy="347472"/>
-          </a:xfrm>
-          <a:prstGeom prst="rect">
-            <a:avLst/>
-          </a:prstGeom>
-          <a:noFill/>
-        </p:spPr>
-        <p:txBody>
-          <a:bodyPr wrap="square">
-            <a:spAutoFit/>
-          </a:bodyPr>
-          <a:lstStyle/>
-          <a:p>
-            <a:pPr algn="ctr"/>
-            <a:r>
-              <a:rPr sz="2200" b="0" i="1">
-                <a:solidFill>
-                  <a:srgbClr val="8C8C8C"/>
-                </a:solidFill>
-                <a:latin typeface="Arial"/>
-              </a:rPr>
-              <a:t/>
-            </a:r>
-          </a:p>
-        </p:txBody>
-      </p:sp>
-      <p:sp>
-        <p:nvSpPr>
-          <p:cNvPr id="4" name="TextBox 3"/>
-          <p:cNvSpPr txBox="1"/>
-          <p:nvPr/>
-        </p:nvSpPr>
-        <p:spPr>
-          <a:xfrm>
-            <a:off x="594360" y="3529584"/>
-            <a:ext cx="11002975" cy="685800"/>
-          </a:xfrm>
-          <a:prstGeom prst="rect">
-            <a:avLst/>
-          </a:prstGeom>
-          <a:noFill/>
-        </p:spPr>
-        <p:txBody>
-          <a:bodyPr wrap="square">
-            <a:spAutoFit/>
-          </a:bodyPr>
-          <a:lstStyle/>
-          <a:p>
-            <a:pPr algn="ctr"/>
-            <a:r>
-              <a:rPr sz="4400" b="1" i="0">
+            <a:off x="640080" y="2985516"/>
+            <a:ext cx="10911535" cy="731520"/>
+          </a:xfrm>
+          <a:prstGeom prst="rect">
+            <a:avLst/>
+          </a:prstGeom>
+          <a:noFill/>
+        </p:spPr>
+        <p:txBody>
+          <a:bodyPr wrap="square">
+            <a:spAutoFit/>
+          </a:bodyPr>
+          <a:lstStyle/>
+          <a:p>
+            <a:pPr algn="ctr"/>
+            <a:r>
+              <a:rPr sz="4800" b="1" i="0">
                 <a:solidFill>
                   <a:srgbClr val="FFFFFF"/>
                 </a:solidFill>
                 <a:latin typeface="Arial"/>
               </a:rPr>
               <a:t>Eis nosso Rei: incomparável é</a:t>
-            </a:r>
-          </a:p>
-        </p:txBody>
-      </p:sp>
-      <p:sp>
-        <p:nvSpPr>
-          <p:cNvPr id="5" name="TextBox 4"/>
-          <p:cNvSpPr txBox="1"/>
-          <p:nvPr/>
-        </p:nvSpPr>
-        <p:spPr>
-          <a:xfrm>
-            <a:off x="594360" y="4251960"/>
-            <a:ext cx="11002975" cy="347472"/>
-          </a:xfrm>
-          <a:prstGeom prst="rect">
-            <a:avLst/>
-          </a:prstGeom>
-          <a:noFill/>
-        </p:spPr>
-        <p:txBody>
-          <a:bodyPr wrap="square">
-            <a:spAutoFit/>
-          </a:bodyPr>
-          <a:lstStyle/>
-          <a:p>
-            <a:pPr algn="ctr"/>
-            <a:r>
-              <a:rPr sz="2200" b="0" i="1">
-                <a:solidFill>
-                  <a:srgbClr val="8C8C8C"/>
-                </a:solidFill>
-                <a:latin typeface="Arial"/>
-              </a:rPr>
-              <a:t/>
             </a:r>
           </a:p>
         </p:txBody>
@@ -4426,23 +4286,23 @@
         </p:nvSpPr>
         <p:spPr>
           <a:xfrm>
-            <a:off x="594360" y="2258568"/>
-            <a:ext cx="11002975" cy="685800"/>
-          </a:xfrm>
-          <a:prstGeom prst="rect">
-            <a:avLst/>
-          </a:prstGeom>
-          <a:noFill/>
-        </p:spPr>
-        <p:txBody>
-          <a:bodyPr wrap="square">
-            <a:spAutoFit/>
-          </a:bodyPr>
-          <a:lstStyle/>
-          <a:p>
-            <a:pPr algn="ctr"/>
-            <a:r>
-              <a:rPr sz="4266" b="1" i="0">
+            <a:off x="640080" y="2052828"/>
+            <a:ext cx="10911535" cy="731520"/>
+          </a:xfrm>
+          <a:prstGeom prst="rect">
+            <a:avLst/>
+          </a:prstGeom>
+          <a:noFill/>
+        </p:spPr>
+        <p:txBody>
+          <a:bodyPr wrap="square">
+            <a:spAutoFit/>
+          </a:bodyPr>
+          <a:lstStyle/>
+          <a:p>
+            <a:pPr algn="ctr"/>
+            <a:r>
+              <a:rPr sz="4600" b="1" i="0">
                 <a:solidFill>
                   <a:srgbClr val="FFFFFF"/>
                 </a:solidFill>
@@ -4461,29 +4321,29 @@
         </p:nvSpPr>
         <p:spPr>
           <a:xfrm>
-            <a:off x="594360" y="2980944"/>
-            <a:ext cx="11002975" cy="347472"/>
-          </a:xfrm>
-          <a:prstGeom prst="rect">
-            <a:avLst/>
-          </a:prstGeom>
-          <a:noFill/>
-        </p:spPr>
-        <p:txBody>
-          <a:bodyPr wrap="square">
-            <a:spAutoFit/>
-          </a:bodyPr>
-          <a:lstStyle/>
-          <a:p>
-            <a:pPr algn="ctr"/>
-            <a:r>
-              <a:rPr sz="2200" b="0" i="1">
-                <a:solidFill>
-                  <a:srgbClr val="8C8C8C"/>
-                </a:solidFill>
-                <a:latin typeface="Arial"/>
-              </a:rPr>
-              <a:t/>
+            <a:off x="640080" y="2985516"/>
+            <a:ext cx="10911535" cy="731520"/>
+          </a:xfrm>
+          <a:prstGeom prst="rect">
+            <a:avLst/>
+          </a:prstGeom>
+          <a:noFill/>
+        </p:spPr>
+        <p:txBody>
+          <a:bodyPr wrap="square">
+            <a:spAutoFit/>
+          </a:bodyPr>
+          <a:lstStyle/>
+          <a:p>
+            <a:pPr algn="ctr"/>
+            <a:r>
+              <a:rPr sz="4800" b="1" i="0">
+                <a:solidFill>
+                  <a:srgbClr val="FFFFFF"/>
+                </a:solidFill>
+                <a:latin typeface="Arial"/>
+              </a:rPr>
+              <a:t>Vinde, adoremos</a:t>
             </a:r>
           </a:p>
         </p:txBody>
@@ -4496,29 +4356,29 @@
         </p:nvSpPr>
         <p:spPr>
           <a:xfrm>
-            <a:off x="594360" y="3529584"/>
-            <a:ext cx="11002975" cy="685800"/>
-          </a:xfrm>
-          <a:prstGeom prst="rect">
-            <a:avLst/>
-          </a:prstGeom>
-          <a:noFill/>
-        </p:spPr>
-        <p:txBody>
-          <a:bodyPr wrap="square">
-            <a:spAutoFit/>
-          </a:bodyPr>
-          <a:lstStyle/>
-          <a:p>
-            <a:pPr algn="ctr"/>
-            <a:r>
-              <a:rPr sz="4400" b="1" i="0">
-                <a:solidFill>
-                  <a:srgbClr val="FFFFFF"/>
-                </a:solidFill>
-                <a:latin typeface="Arial"/>
-              </a:rPr>
-              <a:t>Vinde, adoremos</a:t>
+            <a:off x="640080" y="4128516"/>
+            <a:ext cx="10911535" cy="310896"/>
+          </a:xfrm>
+          <a:prstGeom prst="rect">
+            <a:avLst/>
+          </a:prstGeom>
+          <a:noFill/>
+        </p:spPr>
+        <p:txBody>
+          <a:bodyPr wrap="square">
+            <a:spAutoFit/>
+          </a:bodyPr>
+          <a:lstStyle/>
+          <a:p>
+            <a:pPr algn="ctr"/>
+            <a:r>
+              <a:rPr sz="2000" b="0" i="0">
+                <a:solidFill>
+                  <a:srgbClr val="828282"/>
+                </a:solidFill>
+                <a:latin typeface="Arial"/>
+              </a:rPr>
+              <a:t>見上げよう 神の御座  王なる主を</a:t>
             </a:r>
           </a:p>
         </p:txBody>
@@ -4531,29 +4391,29 @@
         </p:nvSpPr>
         <p:spPr>
           <a:xfrm>
-            <a:off x="594360" y="4251960"/>
-            <a:ext cx="11002975" cy="347472"/>
-          </a:xfrm>
-          <a:prstGeom prst="rect">
-            <a:avLst/>
-          </a:prstGeom>
-          <a:noFill/>
-        </p:spPr>
-        <p:txBody>
-          <a:bodyPr wrap="square">
-            <a:spAutoFit/>
-          </a:bodyPr>
-          <a:lstStyle/>
-          <a:p>
-            <a:pPr algn="ctr"/>
-            <a:r>
-              <a:rPr sz="2200" b="0" i="1">
-                <a:solidFill>
-                  <a:srgbClr val="8C8C8C"/>
-                </a:solidFill>
-                <a:latin typeface="Arial"/>
-              </a:rPr>
-              <a:t/>
+            <a:off x="640080" y="4494276"/>
+            <a:ext cx="10911535" cy="310896"/>
+          </a:xfrm>
+          <a:prstGeom prst="rect">
+            <a:avLst/>
+          </a:prstGeom>
+          <a:noFill/>
+        </p:spPr>
+        <p:txBody>
+          <a:bodyPr wrap="square">
+            <a:spAutoFit/>
+          </a:bodyPr>
+          <a:lstStyle/>
+          <a:p>
+            <a:pPr algn="ctr"/>
+            <a:r>
+              <a:rPr sz="2000" b="0" i="0">
+                <a:solidFill>
+                  <a:srgbClr val="828282"/>
+                </a:solidFill>
+                <a:latin typeface="Arial"/>
+              </a:rPr>
+              <a:t>見上げよう イエスの御名</a:t>
             </a:r>
           </a:p>
         </p:txBody>
@@ -4592,23 +4452,23 @@
         </p:nvSpPr>
         <p:spPr>
           <a:xfrm>
-            <a:off x="594360" y="2258568"/>
-            <a:ext cx="11002975" cy="685800"/>
-          </a:xfrm>
-          <a:prstGeom prst="rect">
-            <a:avLst/>
-          </a:prstGeom>
-          <a:noFill/>
-        </p:spPr>
-        <p:txBody>
-          <a:bodyPr wrap="square">
-            <a:spAutoFit/>
-          </a:bodyPr>
-          <a:lstStyle/>
-          <a:p>
-            <a:pPr algn="ctr"/>
-            <a:r>
-              <a:rPr sz="4400" b="1" i="0">
+            <a:off x="640080" y="2052828"/>
+            <a:ext cx="10911535" cy="731520"/>
+          </a:xfrm>
+          <a:prstGeom prst="rect">
+            <a:avLst/>
+          </a:prstGeom>
+          <a:noFill/>
+        </p:spPr>
+        <p:txBody>
+          <a:bodyPr wrap="square">
+            <a:spAutoFit/>
+          </a:bodyPr>
+          <a:lstStyle/>
+          <a:p>
+            <a:pPr algn="ctr"/>
+            <a:r>
+              <a:rPr sz="4800" b="1" i="0">
                 <a:solidFill>
                   <a:srgbClr val="FFFFFF"/>
                 </a:solidFill>
@@ -4627,29 +4487,29 @@
         </p:nvSpPr>
         <p:spPr>
           <a:xfrm>
-            <a:off x="594360" y="2980944"/>
-            <a:ext cx="11002975" cy="347472"/>
-          </a:xfrm>
-          <a:prstGeom prst="rect">
-            <a:avLst/>
-          </a:prstGeom>
-          <a:noFill/>
-        </p:spPr>
-        <p:txBody>
-          <a:bodyPr wrap="square">
-            <a:spAutoFit/>
-          </a:bodyPr>
-          <a:lstStyle/>
-          <a:p>
-            <a:pPr algn="ctr"/>
-            <a:r>
-              <a:rPr sz="2200" b="0" i="1">
-                <a:solidFill>
-                  <a:srgbClr val="8C8C8C"/>
-                </a:solidFill>
-                <a:latin typeface="Arial"/>
-              </a:rPr>
-              <a:t/>
+            <a:off x="640080" y="2985516"/>
+            <a:ext cx="10911535" cy="731520"/>
+          </a:xfrm>
+          <a:prstGeom prst="rect">
+            <a:avLst/>
+          </a:prstGeom>
+          <a:noFill/>
+        </p:spPr>
+        <p:txBody>
+          <a:bodyPr wrap="square">
+            <a:spAutoFit/>
+          </a:bodyPr>
+          <a:lstStyle/>
+          <a:p>
+            <a:pPr algn="ctr"/>
+            <a:r>
+              <a:rPr sz="4800" b="1" i="0">
+                <a:solidFill>
+                  <a:srgbClr val="FFFFFF"/>
+                </a:solidFill>
+                <a:latin typeface="Arial"/>
+              </a:rPr>
+              <a:t>Vinde, adoremos</a:t>
             </a:r>
           </a:p>
         </p:txBody>
@@ -4662,29 +4522,29 @@
         </p:nvSpPr>
         <p:spPr>
           <a:xfrm>
-            <a:off x="594360" y="3529584"/>
-            <a:ext cx="11002975" cy="685800"/>
-          </a:xfrm>
-          <a:prstGeom prst="rect">
-            <a:avLst/>
-          </a:prstGeom>
-          <a:noFill/>
-        </p:spPr>
-        <p:txBody>
-          <a:bodyPr wrap="square">
-            <a:spAutoFit/>
-          </a:bodyPr>
-          <a:lstStyle/>
-          <a:p>
-            <a:pPr algn="ctr"/>
-            <a:r>
-              <a:rPr sz="4400" b="1" i="0">
-                <a:solidFill>
-                  <a:srgbClr val="FFFFFF"/>
-                </a:solidFill>
-                <a:latin typeface="Arial"/>
-              </a:rPr>
-              <a:t>Vinde, adoremos</a:t>
+            <a:off x="640080" y="4128516"/>
+            <a:ext cx="10911535" cy="310896"/>
+          </a:xfrm>
+          <a:prstGeom prst="rect">
+            <a:avLst/>
+          </a:prstGeom>
+          <a:noFill/>
+        </p:spPr>
+        <p:txBody>
+          <a:bodyPr wrap="square">
+            <a:spAutoFit/>
+          </a:bodyPr>
+          <a:lstStyle/>
+          <a:p>
+            <a:pPr algn="ctr"/>
+            <a:r>
+              <a:rPr sz="2000" b="0" i="0">
+                <a:solidFill>
+                  <a:srgbClr val="828282"/>
+                </a:solidFill>
+                <a:latin typeface="Arial"/>
+              </a:rPr>
+              <a:t>ほめたたえ - よう</a:t>
             </a:r>
           </a:p>
         </p:txBody>
@@ -4697,29 +4557,29 @@
         </p:nvSpPr>
         <p:spPr>
           <a:xfrm>
-            <a:off x="594360" y="4251960"/>
-            <a:ext cx="11002975" cy="347472"/>
-          </a:xfrm>
-          <a:prstGeom prst="rect">
-            <a:avLst/>
-          </a:prstGeom>
-          <a:noFill/>
-        </p:spPr>
-        <p:txBody>
-          <a:bodyPr wrap="square">
-            <a:spAutoFit/>
-          </a:bodyPr>
-          <a:lstStyle/>
-          <a:p>
-            <a:pPr algn="ctr"/>
-            <a:r>
-              <a:rPr sz="2200" b="0" i="1">
-                <a:solidFill>
-                  <a:srgbClr val="8C8C8C"/>
-                </a:solidFill>
-                <a:latin typeface="Arial"/>
-              </a:rPr>
-              <a:t/>
+            <a:off x="640080" y="4494276"/>
+            <a:ext cx="10911535" cy="310896"/>
+          </a:xfrm>
+          <a:prstGeom prst="rect">
+            <a:avLst/>
+          </a:prstGeom>
+          <a:noFill/>
+        </p:spPr>
+        <p:txBody>
+          <a:bodyPr wrap="square">
+            <a:spAutoFit/>
+          </a:bodyPr>
+          <a:lstStyle/>
+          <a:p>
+            <a:pPr algn="ctr"/>
+            <a:r>
+              <a:rPr sz="2000" b="0" i="0">
+                <a:solidFill>
+                  <a:srgbClr val="828282"/>
+                </a:solidFill>
+                <a:latin typeface="Arial"/>
+              </a:rPr>
+              <a:t>見上げよう 神の御座  王なる主を</a:t>
             </a:r>
           </a:p>
         </p:txBody>
@@ -4758,23 +4618,23 @@
         </p:nvSpPr>
         <p:spPr>
           <a:xfrm>
-            <a:off x="594360" y="2258568"/>
-            <a:ext cx="11002975" cy="685800"/>
-          </a:xfrm>
-          <a:prstGeom prst="rect">
-            <a:avLst/>
-          </a:prstGeom>
-          <a:noFill/>
-        </p:spPr>
-        <p:txBody>
-          <a:bodyPr wrap="square">
-            <a:spAutoFit/>
-          </a:bodyPr>
-          <a:lstStyle/>
-          <a:p>
-            <a:pPr algn="ctr"/>
-            <a:r>
-              <a:rPr sz="4400" b="1" i="0">
+            <a:off x="640080" y="2052828"/>
+            <a:ext cx="10911535" cy="731520"/>
+          </a:xfrm>
+          <a:prstGeom prst="rect">
+            <a:avLst/>
+          </a:prstGeom>
+          <a:noFill/>
+        </p:spPr>
+        <p:txBody>
+          <a:bodyPr wrap="square">
+            <a:spAutoFit/>
+          </a:bodyPr>
+          <a:lstStyle/>
+          <a:p>
+            <a:pPr algn="ctr"/>
+            <a:r>
+              <a:rPr sz="4800" b="1" i="0">
                 <a:solidFill>
                   <a:srgbClr val="FFFFFF"/>
                 </a:solidFill>
@@ -4793,29 +4653,29 @@
         </p:nvSpPr>
         <p:spPr>
           <a:xfrm>
-            <a:off x="594360" y="2980944"/>
-            <a:ext cx="11002975" cy="347472"/>
-          </a:xfrm>
-          <a:prstGeom prst="rect">
-            <a:avLst/>
-          </a:prstGeom>
-          <a:noFill/>
-        </p:spPr>
-        <p:txBody>
-          <a:bodyPr wrap="square">
-            <a:spAutoFit/>
-          </a:bodyPr>
-          <a:lstStyle/>
-          <a:p>
-            <a:pPr algn="ctr"/>
-            <a:r>
-              <a:rPr sz="2200" b="0" i="1">
-                <a:solidFill>
-                  <a:srgbClr val="8C8C8C"/>
-                </a:solidFill>
-                <a:latin typeface="Arial"/>
-              </a:rPr>
-              <a:t/>
+            <a:off x="640080" y="2985516"/>
+            <a:ext cx="10911535" cy="731520"/>
+          </a:xfrm>
+          <a:prstGeom prst="rect">
+            <a:avLst/>
+          </a:prstGeom>
+          <a:noFill/>
+        </p:spPr>
+        <p:txBody>
+          <a:bodyPr wrap="square">
+            <a:spAutoFit/>
+          </a:bodyPr>
+          <a:lstStyle/>
+          <a:p>
+            <a:pPr algn="ctr"/>
+            <a:r>
+              <a:rPr sz="4800" b="1" i="0">
+                <a:solidFill>
+                  <a:srgbClr val="FFFFFF"/>
+                </a:solidFill>
+                <a:latin typeface="Arial"/>
+              </a:rPr>
+              <a:t>Quem como Ele cravejado foi?</a:t>
             </a:r>
           </a:p>
         </p:txBody>
@@ -4828,29 +4688,29 @@
         </p:nvSpPr>
         <p:spPr>
           <a:xfrm>
-            <a:off x="594360" y="3529584"/>
-            <a:ext cx="11002975" cy="685800"/>
-          </a:xfrm>
-          <a:prstGeom prst="rect">
-            <a:avLst/>
-          </a:prstGeom>
-          <a:noFill/>
-        </p:spPr>
-        <p:txBody>
-          <a:bodyPr wrap="square">
-            <a:spAutoFit/>
-          </a:bodyPr>
-          <a:lstStyle/>
-          <a:p>
-            <a:pPr algn="ctr"/>
-            <a:r>
-              <a:rPr sz="4400" b="1" i="0">
-                <a:solidFill>
-                  <a:srgbClr val="FFFFFF"/>
-                </a:solidFill>
-                <a:latin typeface="Arial"/>
-              </a:rPr>
-              <a:t>Quem como Ele cravejado foi?</a:t>
+            <a:off x="640080" y="4128516"/>
+            <a:ext cx="10911535" cy="310896"/>
+          </a:xfrm>
+          <a:prstGeom prst="rect">
+            <a:avLst/>
+          </a:prstGeom>
+          <a:noFill/>
+        </p:spPr>
+        <p:txBody>
+          <a:bodyPr wrap="square">
+            <a:spAutoFit/>
+          </a:bodyPr>
+          <a:lstStyle/>
+          <a:p>
+            <a:pPr algn="ctr"/>
+            <a:r>
+              <a:rPr sz="2000" b="0" i="0">
+                <a:solidFill>
+                  <a:srgbClr val="828282"/>
+                </a:solidFill>
+                <a:latin typeface="Arial"/>
+              </a:rPr>
+              <a:t>見上げよう イエスの御名</a:t>
             </a:r>
           </a:p>
         </p:txBody>
@@ -4863,29 +4723,29 @@
         </p:nvSpPr>
         <p:spPr>
           <a:xfrm>
-            <a:off x="594360" y="4251960"/>
-            <a:ext cx="11002975" cy="347472"/>
-          </a:xfrm>
-          <a:prstGeom prst="rect">
-            <a:avLst/>
-          </a:prstGeom>
-          <a:noFill/>
-        </p:spPr>
-        <p:txBody>
-          <a:bodyPr wrap="square">
-            <a:spAutoFit/>
-          </a:bodyPr>
-          <a:lstStyle/>
-          <a:p>
-            <a:pPr algn="ctr"/>
-            <a:r>
-              <a:rPr sz="2200" b="0" i="1">
-                <a:solidFill>
-                  <a:srgbClr val="8C8C8C"/>
-                </a:solidFill>
-                <a:latin typeface="Arial"/>
-              </a:rPr>
-              <a:t/>
+            <a:off x="640080" y="4494276"/>
+            <a:ext cx="10911535" cy="310896"/>
+          </a:xfrm>
+          <a:prstGeom prst="rect">
+            <a:avLst/>
+          </a:prstGeom>
+          <a:noFill/>
+        </p:spPr>
+        <p:txBody>
+          <a:bodyPr wrap="square">
+            <a:spAutoFit/>
+          </a:bodyPr>
+          <a:lstStyle/>
+          <a:p>
+            <a:pPr algn="ctr"/>
+            <a:r>
+              <a:rPr sz="2000" b="0" i="0">
+                <a:solidFill>
+                  <a:srgbClr val="828282"/>
+                </a:solidFill>
+                <a:latin typeface="Arial"/>
+              </a:rPr>
+              <a:t>ほめたたえ - よう</a:t>
             </a:r>
           </a:p>
         </p:txBody>
@@ -4924,23 +4784,23 @@
         </p:nvSpPr>
         <p:spPr>
           <a:xfrm>
-            <a:off x="594360" y="2258568"/>
-            <a:ext cx="11002975" cy="685800"/>
-          </a:xfrm>
-          <a:prstGeom prst="rect">
-            <a:avLst/>
-          </a:prstGeom>
-          <a:noFill/>
-        </p:spPr>
-        <p:txBody>
-          <a:bodyPr wrap="square">
-            <a:spAutoFit/>
-          </a:bodyPr>
-          <a:lstStyle/>
-          <a:p>
-            <a:pPr algn="ctr"/>
-            <a:r>
-              <a:rPr sz="4400" b="1" i="0">
+            <a:off x="640080" y="2052828"/>
+            <a:ext cx="10911535" cy="731520"/>
+          </a:xfrm>
+          <a:prstGeom prst="rect">
+            <a:avLst/>
+          </a:prstGeom>
+          <a:noFill/>
+        </p:spPr>
+        <p:txBody>
+          <a:bodyPr wrap="square">
+            <a:spAutoFit/>
+          </a:bodyPr>
+          <a:lstStyle/>
+          <a:p>
+            <a:pPr algn="ctr"/>
+            <a:r>
+              <a:rPr sz="4800" b="1" i="0">
                 <a:solidFill>
                   <a:srgbClr val="FFFFFF"/>
                 </a:solidFill>
@@ -4959,29 +4819,29 @@
         </p:nvSpPr>
         <p:spPr>
           <a:xfrm>
-            <a:off x="594360" y="2980944"/>
-            <a:ext cx="11002975" cy="347472"/>
-          </a:xfrm>
-          <a:prstGeom prst="rect">
-            <a:avLst/>
-          </a:prstGeom>
-          <a:noFill/>
-        </p:spPr>
-        <p:txBody>
-          <a:bodyPr wrap="square">
-            <a:spAutoFit/>
-          </a:bodyPr>
-          <a:lstStyle/>
-          <a:p>
-            <a:pPr algn="ctr"/>
-            <a:r>
-              <a:rPr sz="2200" b="0" i="1">
-                <a:solidFill>
-                  <a:srgbClr val="8C8C8C"/>
-                </a:solidFill>
-                <a:latin typeface="Arial"/>
-              </a:rPr>
-              <a:t/>
+            <a:off x="640080" y="2985516"/>
+            <a:ext cx="10911535" cy="731520"/>
+          </a:xfrm>
+          <a:prstGeom prst="rect">
+            <a:avLst/>
+          </a:prstGeom>
+          <a:noFill/>
+        </p:spPr>
+        <p:txBody>
+          <a:bodyPr wrap="square">
+            <a:spAutoFit/>
+          </a:bodyPr>
+          <a:lstStyle/>
+          <a:p>
+            <a:pPr algn="ctr"/>
+            <a:r>
+              <a:rPr sz="4800" b="1" i="0">
+                <a:solidFill>
+                  <a:srgbClr val="FFFFFF"/>
+                </a:solidFill>
+                <a:latin typeface="Arial"/>
+              </a:rPr>
+              <a:t>O servo Rei, que pra nós desceu</a:t>
             </a:r>
           </a:p>
         </p:txBody>
@@ -4994,29 +4854,29 @@
         </p:nvSpPr>
         <p:spPr>
           <a:xfrm>
-            <a:off x="594360" y="3529584"/>
-            <a:ext cx="11002975" cy="685800"/>
-          </a:xfrm>
-          <a:prstGeom prst="rect">
-            <a:avLst/>
-          </a:prstGeom>
-          <a:noFill/>
-        </p:spPr>
-        <p:txBody>
-          <a:bodyPr wrap="square">
-            <a:spAutoFit/>
-          </a:bodyPr>
-          <a:lstStyle/>
-          <a:p>
-            <a:pPr algn="ctr"/>
-            <a:r>
-              <a:rPr sz="4400" b="1" i="0">
-                <a:solidFill>
-                  <a:srgbClr val="FFFFFF"/>
-                </a:solidFill>
-                <a:latin typeface="Arial"/>
-              </a:rPr>
-              <a:t>O servo Rei, que pra nós desceu</a:t>
+            <a:off x="640080" y="4128516"/>
+            <a:ext cx="10911535" cy="310896"/>
+          </a:xfrm>
+          <a:prstGeom prst="rect">
+            <a:avLst/>
+          </a:prstGeom>
+          <a:noFill/>
+        </p:spPr>
+        <p:txBody>
+          <a:bodyPr wrap="square">
+            <a:spAutoFit/>
+          </a:bodyPr>
+          <a:lstStyle/>
+          <a:p>
+            <a:pPr algn="ctr"/>
+            <a:r>
+              <a:rPr sz="2000" b="0" i="0">
+                <a:solidFill>
+                  <a:srgbClr val="828282"/>
+                </a:solidFill>
+                <a:latin typeface="Arial"/>
+              </a:rPr>
+              <a:t>見上げよう 神の御座  王なる主を</a:t>
             </a:r>
           </a:p>
         </p:txBody>
@@ -5029,29 +4889,29 @@
         </p:nvSpPr>
         <p:spPr>
           <a:xfrm>
-            <a:off x="594360" y="4251960"/>
-            <a:ext cx="11002975" cy="347472"/>
-          </a:xfrm>
-          <a:prstGeom prst="rect">
-            <a:avLst/>
-          </a:prstGeom>
-          <a:noFill/>
-        </p:spPr>
-        <p:txBody>
-          <a:bodyPr wrap="square">
-            <a:spAutoFit/>
-          </a:bodyPr>
-          <a:lstStyle/>
-          <a:p>
-            <a:pPr algn="ctr"/>
-            <a:r>
-              <a:rPr sz="2200" b="0" i="1">
-                <a:solidFill>
-                  <a:srgbClr val="8C8C8C"/>
-                </a:solidFill>
-                <a:latin typeface="Arial"/>
-              </a:rPr>
-              <a:t/>
+            <a:off x="640080" y="4494276"/>
+            <a:ext cx="10911535" cy="310896"/>
+          </a:xfrm>
+          <a:prstGeom prst="rect">
+            <a:avLst/>
+          </a:prstGeom>
+          <a:noFill/>
+        </p:spPr>
+        <p:txBody>
+          <a:bodyPr wrap="square">
+            <a:spAutoFit/>
+          </a:bodyPr>
+          <a:lstStyle/>
+          <a:p>
+            <a:pPr algn="ctr"/>
+            <a:r>
+              <a:rPr sz="2000" b="0" i="0">
+                <a:solidFill>
+                  <a:srgbClr val="828282"/>
+                </a:solidFill>
+                <a:latin typeface="Arial"/>
+              </a:rPr>
+              <a:t>見上げよう イエスの御名</a:t>
             </a:r>
           </a:p>
         </p:txBody>
@@ -5090,23 +4950,23 @@
         </p:nvSpPr>
         <p:spPr>
           <a:xfrm>
-            <a:off x="594360" y="1837944"/>
-            <a:ext cx="11002975" cy="685800"/>
-          </a:xfrm>
-          <a:prstGeom prst="rect">
-            <a:avLst/>
-          </a:prstGeom>
-          <a:noFill/>
-        </p:spPr>
-        <p:txBody>
-          <a:bodyPr wrap="square">
-            <a:spAutoFit/>
-          </a:bodyPr>
-          <a:lstStyle/>
-          <a:p>
-            <a:pPr algn="ctr"/>
-            <a:r>
-              <a:rPr sz="4400" b="1" i="0">
+            <a:off x="640080" y="1650492"/>
+            <a:ext cx="10911535" cy="731520"/>
+          </a:xfrm>
+          <a:prstGeom prst="rect">
+            <a:avLst/>
+          </a:prstGeom>
+          <a:noFill/>
+        </p:spPr>
+        <p:txBody>
+          <a:bodyPr wrap="square">
+            <a:spAutoFit/>
+          </a:bodyPr>
+          <a:lstStyle/>
+          <a:p>
+            <a:pPr algn="ctr"/>
+            <a:r>
+              <a:rPr sz="4800" b="1" i="0">
                 <a:solidFill>
                   <a:srgbClr val="FFFFFF"/>
                 </a:solidFill>
@@ -5125,8 +4985,8 @@
         </p:nvSpPr>
         <p:spPr>
           <a:xfrm>
-            <a:off x="594360" y="2560320"/>
-            <a:ext cx="11002975" cy="384048"/>
+            <a:off x="640080" y="2418588"/>
+            <a:ext cx="10911535" cy="365760"/>
           </a:xfrm>
           <a:prstGeom prst="rect">
             <a:avLst/>
@@ -5143,7 +5003,7 @@
             <a:r>
               <a:rPr sz="2400" b="0" i="1">
                 <a:solidFill>
-                  <a:srgbClr val="B4B4B4"/>
+                  <a:srgbClr val="AAAAAA"/>
                 </a:solidFill>
                 <a:latin typeface="Arial"/>
               </a:rPr>
@@ -5160,8 +5020,78 @@
         </p:nvSpPr>
         <p:spPr>
           <a:xfrm>
-            <a:off x="594360" y="2980944"/>
-            <a:ext cx="11002975" cy="347472"/>
+            <a:off x="640080" y="2985516"/>
+            <a:ext cx="10911535" cy="731520"/>
+          </a:xfrm>
+          <a:prstGeom prst="rect">
+            <a:avLst/>
+          </a:prstGeom>
+          <a:noFill/>
+        </p:spPr>
+        <p:txBody>
+          <a:bodyPr wrap="square">
+            <a:spAutoFit/>
+          </a:bodyPr>
+          <a:lstStyle/>
+          <a:p>
+            <a:pPr algn="ctr"/>
+            <a:r>
+              <a:rPr sz="4800" b="1" i="0">
+                <a:solidFill>
+                  <a:srgbClr val="FFFFFF"/>
+                </a:solidFill>
+                <a:latin typeface="Arial"/>
+              </a:rPr>
+              <a:t>見上げよう イエスの御名</a:t>
+            </a:r>
+          </a:p>
+        </p:txBody>
+      </p:sp>
+      <p:sp>
+        <p:nvSpPr>
+          <p:cNvPr id="5" name="TextBox 4"/>
+          <p:cNvSpPr txBox="1"/>
+          <p:nvPr/>
+        </p:nvSpPr>
+        <p:spPr>
+          <a:xfrm>
+            <a:off x="640080" y="3753612"/>
+            <a:ext cx="10911535" cy="365760"/>
+          </a:xfrm>
+          <a:prstGeom prst="rect">
+            <a:avLst/>
+          </a:prstGeom>
+          <a:noFill/>
+        </p:spPr>
+        <p:txBody>
+          <a:bodyPr wrap="square">
+            <a:spAutoFit/>
+          </a:bodyPr>
+          <a:lstStyle/>
+          <a:p>
+            <a:pPr algn="ctr"/>
+            <a:r>
+              <a:rPr sz="2400" b="0" i="1">
+                <a:solidFill>
+                  <a:srgbClr val="AAAAAA"/>
+                </a:solidFill>
+                <a:latin typeface="Arial"/>
+              </a:rPr>
+              <a:t>miageyo iesu no mina</a:t>
+            </a:r>
+          </a:p>
+        </p:txBody>
+      </p:sp>
+      <p:sp>
+        <p:nvSpPr>
+          <p:cNvPr id="6" name="TextBox 5"/>
+          <p:cNvSpPr txBox="1"/>
+          <p:nvPr/>
+        </p:nvSpPr>
+        <p:spPr>
+          <a:xfrm>
+            <a:off x="640080" y="4530852"/>
+            <a:ext cx="10911535" cy="310896"/>
           </a:xfrm>
           <a:prstGeom prst="rect">
             <a:avLst/>
@@ -5178,81 +5108,11 @@
             <a:r>
               <a:rPr sz="2000" b="0" i="1">
                 <a:solidFill>
-                  <a:srgbClr val="8C8C8C"/>
-                </a:solidFill>
-                <a:latin typeface="Arial"/>
-              </a:rPr>
-              <a:t/>
-            </a:r>
-          </a:p>
-        </p:txBody>
-      </p:sp>
-      <p:sp>
-        <p:nvSpPr>
-          <p:cNvPr id="5" name="TextBox 4"/>
-          <p:cNvSpPr txBox="1"/>
-          <p:nvPr/>
-        </p:nvSpPr>
-        <p:spPr>
-          <a:xfrm>
-            <a:off x="594360" y="3529584"/>
-            <a:ext cx="11002975" cy="685800"/>
-          </a:xfrm>
-          <a:prstGeom prst="rect">
-            <a:avLst/>
-          </a:prstGeom>
-          <a:noFill/>
-        </p:spPr>
-        <p:txBody>
-          <a:bodyPr wrap="square">
-            <a:spAutoFit/>
-          </a:bodyPr>
-          <a:lstStyle/>
-          <a:p>
-            <a:pPr algn="ctr"/>
-            <a:r>
-              <a:rPr sz="4400" b="1" i="0">
-                <a:solidFill>
-                  <a:srgbClr val="FFFFFF"/>
-                </a:solidFill>
-                <a:latin typeface="Arial"/>
-              </a:rPr>
-              <a:t>見上げよう イエスの御名</a:t>
-            </a:r>
-          </a:p>
-        </p:txBody>
-      </p:sp>
-      <p:sp>
-        <p:nvSpPr>
-          <p:cNvPr id="6" name="TextBox 5"/>
-          <p:cNvSpPr txBox="1"/>
-          <p:nvPr/>
-        </p:nvSpPr>
-        <p:spPr>
-          <a:xfrm>
-            <a:off x="594360" y="4251960"/>
-            <a:ext cx="11002975" cy="384048"/>
-          </a:xfrm>
-          <a:prstGeom prst="rect">
-            <a:avLst/>
-          </a:prstGeom>
-          <a:noFill/>
-        </p:spPr>
-        <p:txBody>
-          <a:bodyPr wrap="square">
-            <a:spAutoFit/>
-          </a:bodyPr>
-          <a:lstStyle/>
-          <a:p>
-            <a:pPr algn="ctr"/>
-            <a:r>
-              <a:rPr sz="2400" b="0" i="1">
-                <a:solidFill>
-                  <a:srgbClr val="B4B4B4"/>
-                </a:solidFill>
-                <a:latin typeface="Arial"/>
-              </a:rPr>
-              <a:t>miageyo iesu no mina</a:t>
+                  <a:srgbClr val="828282"/>
+                </a:solidFill>
+                <a:latin typeface="Arial"/>
+              </a:rPr>
+              <a:t>Eis nosso Deus, no trono a reinar</a:t>
             </a:r>
           </a:p>
         </p:txBody>
@@ -5265,8 +5125,8 @@
         </p:nvSpPr>
         <p:spPr>
           <a:xfrm>
-            <a:off x="594360" y="4672584"/>
-            <a:ext cx="11002975" cy="347472"/>
+            <a:off x="640080" y="4896612"/>
+            <a:ext cx="10911535" cy="310896"/>
           </a:xfrm>
           <a:prstGeom prst="rect">
             <a:avLst/>
@@ -5283,11 +5143,11 @@
             <a:r>
               <a:rPr sz="2000" b="0" i="1">
                 <a:solidFill>
-                  <a:srgbClr val="8C8C8C"/>
-                </a:solidFill>
-                <a:latin typeface="Arial"/>
-              </a:rPr>
-              <a:t/>
+                  <a:srgbClr val="828282"/>
+                </a:solidFill>
+                <a:latin typeface="Arial"/>
+              </a:rPr>
+              <a:t>Vinde, adoremos</a:t>
             </a:r>
           </a:p>
         </p:txBody>
@@ -5326,23 +5186,23 @@
         </p:nvSpPr>
         <p:spPr>
           <a:xfrm>
-            <a:off x="594360" y="1837944"/>
-            <a:ext cx="11002975" cy="685800"/>
-          </a:xfrm>
-          <a:prstGeom prst="rect">
-            <a:avLst/>
-          </a:prstGeom>
-          <a:noFill/>
-        </p:spPr>
-        <p:txBody>
-          <a:bodyPr wrap="square">
-            <a:spAutoFit/>
-          </a:bodyPr>
-          <a:lstStyle/>
-          <a:p>
-            <a:pPr algn="ctr"/>
-            <a:r>
-              <a:rPr sz="4400" b="1" i="0">
+            <a:off x="640080" y="1650492"/>
+            <a:ext cx="10911535" cy="731520"/>
+          </a:xfrm>
+          <a:prstGeom prst="rect">
+            <a:avLst/>
+          </a:prstGeom>
+          <a:noFill/>
+        </p:spPr>
+        <p:txBody>
+          <a:bodyPr wrap="square">
+            <a:spAutoFit/>
+          </a:bodyPr>
+          <a:lstStyle/>
+          <a:p>
+            <a:pPr algn="ctr"/>
+            <a:r>
+              <a:rPr sz="4800" b="1" i="0">
                 <a:solidFill>
                   <a:srgbClr val="FFFFFF"/>
                 </a:solidFill>
@@ -5361,8 +5221,8 @@
         </p:nvSpPr>
         <p:spPr>
           <a:xfrm>
-            <a:off x="594360" y="2560320"/>
-            <a:ext cx="11002975" cy="384048"/>
+            <a:off x="640080" y="2418588"/>
+            <a:ext cx="10911535" cy="365760"/>
           </a:xfrm>
           <a:prstGeom prst="rect">
             <a:avLst/>
@@ -5379,7 +5239,7 @@
             <a:r>
               <a:rPr sz="2400" b="0" i="1">
                 <a:solidFill>
-                  <a:srgbClr val="B4B4B4"/>
+                  <a:srgbClr val="AAAAAA"/>
                 </a:solidFill>
                 <a:latin typeface="Arial"/>
               </a:rPr>
@@ -5396,8 +5256,78 @@
         </p:nvSpPr>
         <p:spPr>
           <a:xfrm>
-            <a:off x="594360" y="2980944"/>
-            <a:ext cx="11002975" cy="347472"/>
+            <a:off x="640080" y="2985516"/>
+            <a:ext cx="10911535" cy="731520"/>
+          </a:xfrm>
+          <a:prstGeom prst="rect">
+            <a:avLst/>
+          </a:prstGeom>
+          <a:noFill/>
+        </p:spPr>
+        <p:txBody>
+          <a:bodyPr wrap="square">
+            <a:spAutoFit/>
+          </a:bodyPr>
+          <a:lstStyle/>
+          <a:p>
+            <a:pPr algn="ctr"/>
+            <a:r>
+              <a:rPr sz="4800" b="1" i="0">
+                <a:solidFill>
+                  <a:srgbClr val="FFFFFF"/>
+                </a:solidFill>
+                <a:latin typeface="Arial"/>
+              </a:rPr>
+              <a:t>見上げよう イエスの御名</a:t>
+            </a:r>
+          </a:p>
+        </p:txBody>
+      </p:sp>
+      <p:sp>
+        <p:nvSpPr>
+          <p:cNvPr id="5" name="TextBox 4"/>
+          <p:cNvSpPr txBox="1"/>
+          <p:nvPr/>
+        </p:nvSpPr>
+        <p:spPr>
+          <a:xfrm>
+            <a:off x="640080" y="3753612"/>
+            <a:ext cx="10911535" cy="365760"/>
+          </a:xfrm>
+          <a:prstGeom prst="rect">
+            <a:avLst/>
+          </a:prstGeom>
+          <a:noFill/>
+        </p:spPr>
+        <p:txBody>
+          <a:bodyPr wrap="square">
+            <a:spAutoFit/>
+          </a:bodyPr>
+          <a:lstStyle/>
+          <a:p>
+            <a:pPr algn="ctr"/>
+            <a:r>
+              <a:rPr sz="2400" b="0" i="1">
+                <a:solidFill>
+                  <a:srgbClr val="AAAAAA"/>
+                </a:solidFill>
+                <a:latin typeface="Arial"/>
+              </a:rPr>
+              <a:t>miageyo iesu no mina</a:t>
+            </a:r>
+          </a:p>
+        </p:txBody>
+      </p:sp>
+      <p:sp>
+        <p:nvSpPr>
+          <p:cNvPr id="6" name="TextBox 5"/>
+          <p:cNvSpPr txBox="1"/>
+          <p:nvPr/>
+        </p:nvSpPr>
+        <p:spPr>
+          <a:xfrm>
+            <a:off x="640080" y="4530852"/>
+            <a:ext cx="10911535" cy="310896"/>
           </a:xfrm>
           <a:prstGeom prst="rect">
             <a:avLst/>
@@ -5414,81 +5344,11 @@
             <a:r>
               <a:rPr sz="2000" b="0" i="1">
                 <a:solidFill>
-                  <a:srgbClr val="8C8C8C"/>
-                </a:solidFill>
-                <a:latin typeface="Arial"/>
-              </a:rPr>
-              <a:t/>
-            </a:r>
-          </a:p>
-        </p:txBody>
-      </p:sp>
-      <p:sp>
-        <p:nvSpPr>
-          <p:cNvPr id="5" name="TextBox 4"/>
-          <p:cNvSpPr txBox="1"/>
-          <p:nvPr/>
-        </p:nvSpPr>
-        <p:spPr>
-          <a:xfrm>
-            <a:off x="594360" y="3529584"/>
-            <a:ext cx="11002975" cy="685800"/>
-          </a:xfrm>
-          <a:prstGeom prst="rect">
-            <a:avLst/>
-          </a:prstGeom>
-          <a:noFill/>
-        </p:spPr>
-        <p:txBody>
-          <a:bodyPr wrap="square">
-            <a:spAutoFit/>
-          </a:bodyPr>
-          <a:lstStyle/>
-          <a:p>
-            <a:pPr algn="ctr"/>
-            <a:r>
-              <a:rPr sz="4400" b="1" i="0">
-                <a:solidFill>
-                  <a:srgbClr val="FFFFFF"/>
-                </a:solidFill>
-                <a:latin typeface="Arial"/>
-              </a:rPr>
-              <a:t>見上げよう イエスの御名</a:t>
-            </a:r>
-          </a:p>
-        </p:txBody>
-      </p:sp>
-      <p:sp>
-        <p:nvSpPr>
-          <p:cNvPr id="6" name="TextBox 5"/>
-          <p:cNvSpPr txBox="1"/>
-          <p:nvPr/>
-        </p:nvSpPr>
-        <p:spPr>
-          <a:xfrm>
-            <a:off x="594360" y="4251960"/>
-            <a:ext cx="11002975" cy="384048"/>
-          </a:xfrm>
-          <a:prstGeom prst="rect">
-            <a:avLst/>
-          </a:prstGeom>
-          <a:noFill/>
-        </p:spPr>
-        <p:txBody>
-          <a:bodyPr wrap="square">
-            <a:spAutoFit/>
-          </a:bodyPr>
-          <a:lstStyle/>
-          <a:p>
-            <a:pPr algn="ctr"/>
-            <a:r>
-              <a:rPr sz="2400" b="0" i="1">
-                <a:solidFill>
-                  <a:srgbClr val="B4B4B4"/>
-                </a:solidFill>
-                <a:latin typeface="Arial"/>
-              </a:rPr>
-              <a:t>miageyo iesu no mina</a:t>
+                  <a:srgbClr val="828282"/>
+                </a:solidFill>
+                <a:latin typeface="Arial"/>
+              </a:rPr>
+              <a:t>Eis nosso Deus, no trono a reinar</a:t>
             </a:r>
           </a:p>
         </p:txBody>
@@ -5501,8 +5361,8 @@
         </p:nvSpPr>
         <p:spPr>
           <a:xfrm>
-            <a:off x="594360" y="4672584"/>
-            <a:ext cx="11002975" cy="347472"/>
+            <a:off x="640080" y="4896612"/>
+            <a:ext cx="10911535" cy="310896"/>
           </a:xfrm>
           <a:prstGeom prst="rect">
             <a:avLst/>
@@ -5519,11 +5379,11 @@
             <a:r>
               <a:rPr sz="2000" b="0" i="1">
                 <a:solidFill>
-                  <a:srgbClr val="8C8C8C"/>
-                </a:solidFill>
-                <a:latin typeface="Arial"/>
-              </a:rPr>
-              <a:t/>
+                  <a:srgbClr val="828282"/>
+                </a:solidFill>
+                <a:latin typeface="Arial"/>
+              </a:rPr>
+              <a:t>Vinde, adoremos</a:t>
             </a:r>
           </a:p>
         </p:txBody>
@@ -5562,23 +5422,23 @@
         </p:nvSpPr>
         <p:spPr>
           <a:xfrm>
-            <a:off x="594360" y="2683764"/>
-            <a:ext cx="11002975" cy="685800"/>
-          </a:xfrm>
-          <a:prstGeom prst="rect">
-            <a:avLst/>
-          </a:prstGeom>
-          <a:noFill/>
-        </p:spPr>
-        <p:txBody>
-          <a:bodyPr wrap="square">
-            <a:spAutoFit/>
-          </a:bodyPr>
-          <a:lstStyle/>
-          <a:p>
-            <a:pPr algn="ctr"/>
-            <a:r>
-              <a:rPr sz="4400" b="1" i="0">
+            <a:off x="640080" y="2500884"/>
+            <a:ext cx="10911535" cy="731520"/>
+          </a:xfrm>
+          <a:prstGeom prst="rect">
+            <a:avLst/>
+          </a:prstGeom>
+          <a:noFill/>
+        </p:spPr>
+        <p:txBody>
+          <a:bodyPr wrap="square">
+            <a:spAutoFit/>
+          </a:bodyPr>
+          <a:lstStyle/>
+          <a:p>
+            <a:pPr algn="ctr"/>
+            <a:r>
+              <a:rPr sz="4800" b="1" i="0">
                 <a:solidFill>
                   <a:srgbClr val="FFFFFF"/>
                 </a:solidFill>
@@ -5597,8 +5457,8 @@
         </p:nvSpPr>
         <p:spPr>
           <a:xfrm>
-            <a:off x="594360" y="3406140"/>
-            <a:ext cx="11002975" cy="384048"/>
+            <a:off x="640080" y="3268980"/>
+            <a:ext cx="10911535" cy="365760"/>
           </a:xfrm>
           <a:prstGeom prst="rect">
             <a:avLst/>
@@ -5615,7 +5475,7 @@
             <a:r>
               <a:rPr sz="2400" b="0" i="1">
                 <a:solidFill>
-                  <a:srgbClr val="B4B4B4"/>
+                  <a:srgbClr val="AAAAAA"/>
                 </a:solidFill>
                 <a:latin typeface="Arial"/>
               </a:rPr>
@@ -5632,8 +5492,8 @@
         </p:nvSpPr>
         <p:spPr>
           <a:xfrm>
-            <a:off x="594360" y="3826764"/>
-            <a:ext cx="11002975" cy="347472"/>
+            <a:off x="640080" y="4046220"/>
+            <a:ext cx="10911535" cy="310896"/>
           </a:xfrm>
           <a:prstGeom prst="rect">
             <a:avLst/>
@@ -5650,11 +5510,11 @@
             <a:r>
               <a:rPr sz="2000" b="0" i="1">
                 <a:solidFill>
-                  <a:srgbClr val="8C8C8C"/>
-                </a:solidFill>
-                <a:latin typeface="Arial"/>
-              </a:rPr>
-              <a:t/>
+                  <a:srgbClr val="828282"/>
+                </a:solidFill>
+                <a:latin typeface="Arial"/>
+              </a:rPr>
+              <a:t>Eis nosso Rei: incomparável é</a:t>
             </a:r>
           </a:p>
         </p:txBody>
@@ -5693,23 +5553,23 @@
         </p:nvSpPr>
         <p:spPr>
           <a:xfrm>
-            <a:off x="594360" y="2683764"/>
-            <a:ext cx="11002975" cy="685800"/>
-          </a:xfrm>
-          <a:prstGeom prst="rect">
-            <a:avLst/>
-          </a:prstGeom>
-          <a:noFill/>
-        </p:spPr>
-        <p:txBody>
-          <a:bodyPr wrap="square">
-            <a:spAutoFit/>
-          </a:bodyPr>
-          <a:lstStyle/>
-          <a:p>
-            <a:pPr algn="ctr"/>
-            <a:r>
-              <a:rPr sz="4400" b="1" i="0">
+            <a:off x="640080" y="2500884"/>
+            <a:ext cx="10911535" cy="731520"/>
+          </a:xfrm>
+          <a:prstGeom prst="rect">
+            <a:avLst/>
+          </a:prstGeom>
+          <a:noFill/>
+        </p:spPr>
+        <p:txBody>
+          <a:bodyPr wrap="square">
+            <a:spAutoFit/>
+          </a:bodyPr>
+          <a:lstStyle/>
+          <a:p>
+            <a:pPr algn="ctr"/>
+            <a:r>
+              <a:rPr sz="4800" b="1" i="0">
                 <a:solidFill>
                   <a:srgbClr val="FFFFFF"/>
                 </a:solidFill>
@@ -5728,8 +5588,8 @@
         </p:nvSpPr>
         <p:spPr>
           <a:xfrm>
-            <a:off x="594360" y="3406140"/>
-            <a:ext cx="11002975" cy="384048"/>
+            <a:off x="640080" y="3268980"/>
+            <a:ext cx="10911535" cy="365760"/>
           </a:xfrm>
           <a:prstGeom prst="rect">
             <a:avLst/>
@@ -5746,7 +5606,7 @@
             <a:r>
               <a:rPr sz="2400" b="0" i="1">
                 <a:solidFill>
-                  <a:srgbClr val="B4B4B4"/>
+                  <a:srgbClr val="AAAAAA"/>
                 </a:solidFill>
                 <a:latin typeface="Arial"/>
               </a:rPr>
@@ -5763,8 +5623,8 @@
         </p:nvSpPr>
         <p:spPr>
           <a:xfrm>
-            <a:off x="594360" y="3826764"/>
-            <a:ext cx="11002975" cy="347472"/>
+            <a:off x="640080" y="4046220"/>
+            <a:ext cx="10911535" cy="310896"/>
           </a:xfrm>
           <a:prstGeom prst="rect">
             <a:avLst/>
@@ -5781,11 +5641,11 @@
             <a:r>
               <a:rPr sz="2000" b="0" i="1">
                 <a:solidFill>
-                  <a:srgbClr val="8C8C8C"/>
-                </a:solidFill>
-                <a:latin typeface="Arial"/>
-              </a:rPr>
-              <a:t/>
+                  <a:srgbClr val="828282"/>
+                </a:solidFill>
+                <a:latin typeface="Arial"/>
+              </a:rPr>
+              <a:t>Eis nosso Rei: incomparável é</a:t>
             </a:r>
           </a:p>
         </p:txBody>
@@ -5824,23 +5684,23 @@
         </p:nvSpPr>
         <p:spPr>
           <a:xfrm>
-            <a:off x="594360" y="2258568"/>
-            <a:ext cx="11002975" cy="685800"/>
-          </a:xfrm>
-          <a:prstGeom prst="rect">
-            <a:avLst/>
-          </a:prstGeom>
-          <a:noFill/>
-        </p:spPr>
-        <p:txBody>
-          <a:bodyPr wrap="square">
-            <a:spAutoFit/>
-          </a:bodyPr>
-          <a:lstStyle/>
-          <a:p>
-            <a:pPr algn="ctr"/>
-            <a:r>
-              <a:rPr sz="4400" b="1" i="0">
+            <a:off x="640080" y="2052828"/>
+            <a:ext cx="10911535" cy="731520"/>
+          </a:xfrm>
+          <a:prstGeom prst="rect">
+            <a:avLst/>
+          </a:prstGeom>
+          <a:noFill/>
+        </p:spPr>
+        <p:txBody>
+          <a:bodyPr wrap="square">
+            <a:spAutoFit/>
+          </a:bodyPr>
+          <a:lstStyle/>
+          <a:p>
+            <a:pPr algn="ctr"/>
+            <a:r>
+              <a:rPr sz="4800" b="1" i="0">
                 <a:solidFill>
                   <a:srgbClr val="FFFFFF"/>
                 </a:solidFill>
@@ -5859,29 +5719,29 @@
         </p:nvSpPr>
         <p:spPr>
           <a:xfrm>
-            <a:off x="594360" y="2980944"/>
-            <a:ext cx="11002975" cy="347472"/>
-          </a:xfrm>
-          <a:prstGeom prst="rect">
-            <a:avLst/>
-          </a:prstGeom>
-          <a:noFill/>
-        </p:spPr>
-        <p:txBody>
-          <a:bodyPr wrap="square">
-            <a:spAutoFit/>
-          </a:bodyPr>
-          <a:lstStyle/>
-          <a:p>
-            <a:pPr algn="ctr"/>
-            <a:r>
-              <a:rPr sz="2200" b="0" i="1">
-                <a:solidFill>
-                  <a:srgbClr val="8C8C8C"/>
-                </a:solidFill>
-                <a:latin typeface="Arial"/>
-              </a:rPr>
-              <a:t/>
+            <a:off x="640080" y="2985516"/>
+            <a:ext cx="10911535" cy="731520"/>
+          </a:xfrm>
+          <a:prstGeom prst="rect">
+            <a:avLst/>
+          </a:prstGeom>
+          <a:noFill/>
+        </p:spPr>
+        <p:txBody>
+          <a:bodyPr wrap="square">
+            <a:spAutoFit/>
+          </a:bodyPr>
+          <a:lstStyle/>
+          <a:p>
+            <a:pPr algn="ctr"/>
+            <a:r>
+              <a:rPr sz="4800" b="1" i="0">
+                <a:solidFill>
+                  <a:srgbClr val="FFFFFF"/>
+                </a:solidFill>
+                <a:latin typeface="Arial"/>
+              </a:rPr>
+              <a:t>Quem contou da areia cada grão?</a:t>
             </a:r>
           </a:p>
         </p:txBody>
@@ -5894,29 +5754,29 @@
         </p:nvSpPr>
         <p:spPr>
           <a:xfrm>
-            <a:off x="594360" y="3529584"/>
-            <a:ext cx="11002975" cy="685800"/>
-          </a:xfrm>
-          <a:prstGeom prst="rect">
-            <a:avLst/>
-          </a:prstGeom>
-          <a:noFill/>
-        </p:spPr>
-        <p:txBody>
-          <a:bodyPr wrap="square">
-            <a:spAutoFit/>
-          </a:bodyPr>
-          <a:lstStyle/>
-          <a:p>
-            <a:pPr algn="ctr"/>
-            <a:r>
-              <a:rPr sz="4400" b="1" i="0">
-                <a:solidFill>
-                  <a:srgbClr val="FFFFFF"/>
-                </a:solidFill>
-                <a:latin typeface="Arial"/>
-              </a:rPr>
-              <a:t>Quem contou da areia cada grão?</a:t>
+            <a:off x="640080" y="4128516"/>
+            <a:ext cx="10911535" cy="310896"/>
+          </a:xfrm>
+          <a:prstGeom prst="rect">
+            <a:avLst/>
+          </a:prstGeom>
+          <a:noFill/>
+        </p:spPr>
+        <p:txBody>
+          <a:bodyPr wrap="square">
+            <a:spAutoFit/>
+          </a:bodyPr>
+          <a:lstStyle/>
+          <a:p>
+            <a:pPr algn="ctr"/>
+            <a:r>
+              <a:rPr sz="2000" b="0" i="0">
+                <a:solidFill>
+                  <a:srgbClr val="828282"/>
+                </a:solidFill>
+                <a:latin typeface="Arial"/>
+              </a:rPr>
+              <a:t>海もやまも空も 全ては御手の中</a:t>
             </a:r>
           </a:p>
         </p:txBody>
@@ -5929,29 +5789,29 @@
         </p:nvSpPr>
         <p:spPr>
           <a:xfrm>
-            <a:off x="594360" y="4251960"/>
-            <a:ext cx="11002975" cy="347472"/>
-          </a:xfrm>
-          <a:prstGeom prst="rect">
-            <a:avLst/>
-          </a:prstGeom>
-          <a:noFill/>
-        </p:spPr>
-        <p:txBody>
-          <a:bodyPr wrap="square">
-            <a:spAutoFit/>
-          </a:bodyPr>
-          <a:lstStyle/>
-          <a:p>
-            <a:pPr algn="ctr"/>
-            <a:r>
-              <a:rPr sz="2200" b="0" i="1">
-                <a:solidFill>
-                  <a:srgbClr val="8C8C8C"/>
-                </a:solidFill>
-                <a:latin typeface="Arial"/>
-              </a:rPr>
-              <a:t/>
+            <a:off x="640080" y="4494276"/>
+            <a:ext cx="10911535" cy="310896"/>
+          </a:xfrm>
+          <a:prstGeom prst="rect">
+            <a:avLst/>
+          </a:prstGeom>
+          <a:noFill/>
+        </p:spPr>
+        <p:txBody>
+          <a:bodyPr wrap="square">
+            <a:spAutoFit/>
+          </a:bodyPr>
+          <a:lstStyle/>
+          <a:p>
+            <a:pPr algn="ctr"/>
+            <a:r>
+              <a:rPr sz="2000" b="0" i="0">
+                <a:solidFill>
+                  <a:srgbClr val="828282"/>
+                </a:solidFill>
+                <a:latin typeface="Arial"/>
+              </a:rPr>
+              <a:t>全地が主を恐れ喜び声上げる</a:t>
             </a:r>
           </a:p>
         </p:txBody>
@@ -5990,23 +5850,23 @@
         </p:nvSpPr>
         <p:spPr>
           <a:xfrm>
-            <a:off x="594360" y="2258568"/>
-            <a:ext cx="11002975" cy="685800"/>
-          </a:xfrm>
-          <a:prstGeom prst="rect">
-            <a:avLst/>
-          </a:prstGeom>
-          <a:noFill/>
-        </p:spPr>
-        <p:txBody>
-          <a:bodyPr wrap="square">
-            <a:spAutoFit/>
-          </a:bodyPr>
-          <a:lstStyle/>
-          <a:p>
-            <a:pPr algn="ctr"/>
-            <a:r>
-              <a:rPr sz="3805" b="1" i="0">
+            <a:off x="640080" y="2052828"/>
+            <a:ext cx="10911535" cy="731520"/>
+          </a:xfrm>
+          <a:prstGeom prst="rect">
+            <a:avLst/>
+          </a:prstGeom>
+          <a:noFill/>
+        </p:spPr>
+        <p:txBody>
+          <a:bodyPr wrap="square">
+            <a:spAutoFit/>
+          </a:bodyPr>
+          <a:lstStyle/>
+          <a:p>
+            <a:pPr algn="ctr"/>
+            <a:r>
+              <a:rPr sz="4100" b="1" i="0">
                 <a:solidFill>
                   <a:srgbClr val="FFFFFF"/>
                 </a:solidFill>
@@ -6025,99 +5885,29 @@
         </p:nvSpPr>
         <p:spPr>
           <a:xfrm>
-            <a:off x="594360" y="2980944"/>
-            <a:ext cx="11002975" cy="347472"/>
-          </a:xfrm>
-          <a:prstGeom prst="rect">
-            <a:avLst/>
-          </a:prstGeom>
-          <a:noFill/>
-        </p:spPr>
-        <p:txBody>
-          <a:bodyPr wrap="square">
-            <a:spAutoFit/>
-          </a:bodyPr>
-          <a:lstStyle/>
-          <a:p>
-            <a:pPr algn="ctr"/>
-            <a:r>
-              <a:rPr sz="2200" b="0" i="1">
-                <a:solidFill>
-                  <a:srgbClr val="8C8C8C"/>
-                </a:solidFill>
-                <a:latin typeface="Arial"/>
-              </a:rPr>
-              <a:t/>
-            </a:r>
-          </a:p>
-        </p:txBody>
-      </p:sp>
-      <p:sp>
-        <p:nvSpPr>
-          <p:cNvPr id="4" name="TextBox 3"/>
-          <p:cNvSpPr txBox="1"/>
-          <p:nvPr/>
-        </p:nvSpPr>
-        <p:spPr>
-          <a:xfrm>
-            <a:off x="594360" y="3529584"/>
-            <a:ext cx="11002975" cy="685800"/>
-          </a:xfrm>
-          <a:prstGeom prst="rect">
-            <a:avLst/>
-          </a:prstGeom>
-          <a:noFill/>
-        </p:spPr>
-        <p:txBody>
-          <a:bodyPr wrap="square">
-            <a:spAutoFit/>
-          </a:bodyPr>
-          <a:lstStyle/>
-          <a:p>
-            <a:pPr algn="ctr"/>
-            <a:r>
-              <a:rPr sz="4400" b="1" i="0">
+            <a:off x="640080" y="2985516"/>
+            <a:ext cx="10911535" cy="731520"/>
+          </a:xfrm>
+          <a:prstGeom prst="rect">
+            <a:avLst/>
+          </a:prstGeom>
+          <a:noFill/>
+        </p:spPr>
+        <p:txBody>
+          <a:bodyPr wrap="square">
+            <a:spAutoFit/>
+          </a:bodyPr>
+          <a:lstStyle/>
+          <a:p>
+            <a:pPr algn="ctr"/>
+            <a:r>
+              <a:rPr sz="4800" b="1" i="0">
                 <a:solidFill>
                   <a:srgbClr val="FFFFFF"/>
                 </a:solidFill>
                 <a:latin typeface="Arial"/>
               </a:rPr>
               <a:t>Rejubila toda a criação</a:t>
-            </a:r>
-          </a:p>
-        </p:txBody>
-      </p:sp>
-      <p:sp>
-        <p:nvSpPr>
-          <p:cNvPr id="5" name="TextBox 4"/>
-          <p:cNvSpPr txBox="1"/>
-          <p:nvPr/>
-        </p:nvSpPr>
-        <p:spPr>
-          <a:xfrm>
-            <a:off x="594360" y="4251960"/>
-            <a:ext cx="11002975" cy="347472"/>
-          </a:xfrm>
-          <a:prstGeom prst="rect">
-            <a:avLst/>
-          </a:prstGeom>
-          <a:noFill/>
-        </p:spPr>
-        <p:txBody>
-          <a:bodyPr wrap="square">
-            <a:spAutoFit/>
-          </a:bodyPr>
-          <a:lstStyle/>
-          <a:p>
-            <a:pPr algn="ctr"/>
-            <a:r>
-              <a:rPr sz="2200" b="0" i="1">
-                <a:solidFill>
-                  <a:srgbClr val="8C8C8C"/>
-                </a:solidFill>
-                <a:latin typeface="Arial"/>
-              </a:rPr>
-              <a:t/>
             </a:r>
           </a:p>
         </p:txBody>
@@ -6156,23 +5946,23 @@
         </p:nvSpPr>
         <p:spPr>
           <a:xfrm>
-            <a:off x="594360" y="2258568"/>
-            <a:ext cx="11002975" cy="685800"/>
-          </a:xfrm>
-          <a:prstGeom prst="rect">
-            <a:avLst/>
-          </a:prstGeom>
-          <a:noFill/>
-        </p:spPr>
-        <p:txBody>
-          <a:bodyPr wrap="square">
-            <a:spAutoFit/>
-          </a:bodyPr>
-          <a:lstStyle/>
-          <a:p>
-            <a:pPr algn="ctr"/>
-            <a:r>
-              <a:rPr sz="4266" b="1" i="0">
+            <a:off x="640080" y="2052828"/>
+            <a:ext cx="10911535" cy="731520"/>
+          </a:xfrm>
+          <a:prstGeom prst="rect">
+            <a:avLst/>
+          </a:prstGeom>
+          <a:noFill/>
+        </p:spPr>
+        <p:txBody>
+          <a:bodyPr wrap="square">
+            <a:spAutoFit/>
+          </a:bodyPr>
+          <a:lstStyle/>
+          <a:p>
+            <a:pPr algn="ctr"/>
+            <a:r>
+              <a:rPr sz="4600" b="1" i="0">
                 <a:solidFill>
                   <a:srgbClr val="FFFFFF"/>
                 </a:solidFill>
@@ -6191,29 +5981,29 @@
         </p:nvSpPr>
         <p:spPr>
           <a:xfrm>
-            <a:off x="594360" y="2980944"/>
-            <a:ext cx="11002975" cy="347472"/>
-          </a:xfrm>
-          <a:prstGeom prst="rect">
-            <a:avLst/>
-          </a:prstGeom>
-          <a:noFill/>
-        </p:spPr>
-        <p:txBody>
-          <a:bodyPr wrap="square">
-            <a:spAutoFit/>
-          </a:bodyPr>
-          <a:lstStyle/>
-          <a:p>
-            <a:pPr algn="ctr"/>
-            <a:r>
-              <a:rPr sz="2200" b="0" i="1">
-                <a:solidFill>
-                  <a:srgbClr val="8C8C8C"/>
-                </a:solidFill>
-                <a:latin typeface="Arial"/>
-              </a:rPr>
-              <a:t/>
+            <a:off x="640080" y="2985516"/>
+            <a:ext cx="10911535" cy="731520"/>
+          </a:xfrm>
+          <a:prstGeom prst="rect">
+            <a:avLst/>
+          </a:prstGeom>
+          <a:noFill/>
+        </p:spPr>
+        <p:txBody>
+          <a:bodyPr wrap="square">
+            <a:spAutoFit/>
+          </a:bodyPr>
+          <a:lstStyle/>
+          <a:p>
+            <a:pPr algn="ctr"/>
+            <a:r>
+              <a:rPr sz="4800" b="1" i="0">
+                <a:solidFill>
+                  <a:srgbClr val="FFFFFF"/>
+                </a:solidFill>
+                <a:latin typeface="Arial"/>
+              </a:rPr>
+              <a:t>Vinde, adoremos</a:t>
             </a:r>
           </a:p>
         </p:txBody>
@@ -6226,29 +6016,29 @@
         </p:nvSpPr>
         <p:spPr>
           <a:xfrm>
-            <a:off x="594360" y="3529584"/>
-            <a:ext cx="11002975" cy="685800"/>
-          </a:xfrm>
-          <a:prstGeom prst="rect">
-            <a:avLst/>
-          </a:prstGeom>
-          <a:noFill/>
-        </p:spPr>
-        <p:txBody>
-          <a:bodyPr wrap="square">
-            <a:spAutoFit/>
-          </a:bodyPr>
-          <a:lstStyle/>
-          <a:p>
-            <a:pPr algn="ctr"/>
-            <a:r>
-              <a:rPr sz="4400" b="1" i="0">
-                <a:solidFill>
-                  <a:srgbClr val="FFFFFF"/>
-                </a:solidFill>
-                <a:latin typeface="Arial"/>
-              </a:rPr>
-              <a:t>Vinde, adoremos</a:t>
+            <a:off x="640080" y="4128516"/>
+            <a:ext cx="10911535" cy="310896"/>
+          </a:xfrm>
+          <a:prstGeom prst="rect">
+            <a:avLst/>
+          </a:prstGeom>
+          <a:noFill/>
+        </p:spPr>
+        <p:txBody>
+          <a:bodyPr wrap="square">
+            <a:spAutoFit/>
+          </a:bodyPr>
+          <a:lstStyle/>
+          <a:p>
+            <a:pPr algn="ctr"/>
+            <a:r>
+              <a:rPr sz="2000" b="0" i="0">
+                <a:solidFill>
+                  <a:srgbClr val="828282"/>
+                </a:solidFill>
+                <a:latin typeface="Arial"/>
+              </a:rPr>
+              <a:t>見上げよう 神の御座  王なる主を</a:t>
             </a:r>
           </a:p>
         </p:txBody>
@@ -6261,29 +6051,29 @@
         </p:nvSpPr>
         <p:spPr>
           <a:xfrm>
-            <a:off x="594360" y="4251960"/>
-            <a:ext cx="11002975" cy="347472"/>
-          </a:xfrm>
-          <a:prstGeom prst="rect">
-            <a:avLst/>
-          </a:prstGeom>
-          <a:noFill/>
-        </p:spPr>
-        <p:txBody>
-          <a:bodyPr wrap="square">
-            <a:spAutoFit/>
-          </a:bodyPr>
-          <a:lstStyle/>
-          <a:p>
-            <a:pPr algn="ctr"/>
-            <a:r>
-              <a:rPr sz="2200" b="0" i="1">
-                <a:solidFill>
-                  <a:srgbClr val="8C8C8C"/>
-                </a:solidFill>
-                <a:latin typeface="Arial"/>
-              </a:rPr>
-              <a:t/>
+            <a:off x="640080" y="4494276"/>
+            <a:ext cx="10911535" cy="310896"/>
+          </a:xfrm>
+          <a:prstGeom prst="rect">
+            <a:avLst/>
+          </a:prstGeom>
+          <a:noFill/>
+        </p:spPr>
+        <p:txBody>
+          <a:bodyPr wrap="square">
+            <a:spAutoFit/>
+          </a:bodyPr>
+          <a:lstStyle/>
+          <a:p>
+            <a:pPr algn="ctr"/>
+            <a:r>
+              <a:rPr sz="2000" b="0" i="0">
+                <a:solidFill>
+                  <a:srgbClr val="828282"/>
+                </a:solidFill>
+                <a:latin typeface="Arial"/>
+              </a:rPr>
+              <a:t>見上げよう イエスの御名</a:t>
             </a:r>
           </a:p>
         </p:txBody>
@@ -6322,23 +6112,23 @@
         </p:nvSpPr>
         <p:spPr>
           <a:xfrm>
-            <a:off x="594360" y="2258568"/>
-            <a:ext cx="11002975" cy="685800"/>
-          </a:xfrm>
-          <a:prstGeom prst="rect">
-            <a:avLst/>
-          </a:prstGeom>
-          <a:noFill/>
-        </p:spPr>
-        <p:txBody>
-          <a:bodyPr wrap="square">
-            <a:spAutoFit/>
-          </a:bodyPr>
-          <a:lstStyle/>
-          <a:p>
-            <a:pPr algn="ctr"/>
-            <a:r>
-              <a:rPr sz="4400" b="1" i="0">
+            <a:off x="640080" y="2052828"/>
+            <a:ext cx="10911535" cy="731520"/>
+          </a:xfrm>
+          <a:prstGeom prst="rect">
+            <a:avLst/>
+          </a:prstGeom>
+          <a:noFill/>
+        </p:spPr>
+        <p:txBody>
+          <a:bodyPr wrap="square">
+            <a:spAutoFit/>
+          </a:bodyPr>
+          <a:lstStyle/>
+          <a:p>
+            <a:pPr algn="ctr"/>
+            <a:r>
+              <a:rPr sz="4800" b="1" i="0">
                 <a:solidFill>
                   <a:srgbClr val="FFFFFF"/>
                 </a:solidFill>
@@ -6357,29 +6147,29 @@
         </p:nvSpPr>
         <p:spPr>
           <a:xfrm>
-            <a:off x="594360" y="2980944"/>
-            <a:ext cx="11002975" cy="347472"/>
-          </a:xfrm>
-          <a:prstGeom prst="rect">
-            <a:avLst/>
-          </a:prstGeom>
-          <a:noFill/>
-        </p:spPr>
-        <p:txBody>
-          <a:bodyPr wrap="square">
-            <a:spAutoFit/>
-          </a:bodyPr>
-          <a:lstStyle/>
-          <a:p>
-            <a:pPr algn="ctr"/>
-            <a:r>
-              <a:rPr sz="2200" b="0" i="1">
-                <a:solidFill>
-                  <a:srgbClr val="8C8C8C"/>
-                </a:solidFill>
-                <a:latin typeface="Arial"/>
-              </a:rPr>
-              <a:t/>
+            <a:off x="640080" y="2985516"/>
+            <a:ext cx="10911535" cy="731520"/>
+          </a:xfrm>
+          <a:prstGeom prst="rect">
+            <a:avLst/>
+          </a:prstGeom>
+          <a:noFill/>
+        </p:spPr>
+        <p:txBody>
+          <a:bodyPr wrap="square">
+            <a:spAutoFit/>
+          </a:bodyPr>
+          <a:lstStyle/>
+          <a:p>
+            <a:pPr algn="ctr"/>
+            <a:r>
+              <a:rPr sz="4800" b="1" i="0">
+                <a:solidFill>
+                  <a:srgbClr val="FFFFFF"/>
+                </a:solidFill>
+                <a:latin typeface="Arial"/>
+              </a:rPr>
+              <a:t>Vinde, adoremos</a:t>
             </a:r>
           </a:p>
         </p:txBody>
@@ -6392,29 +6182,29 @@
         </p:nvSpPr>
         <p:spPr>
           <a:xfrm>
-            <a:off x="594360" y="3529584"/>
-            <a:ext cx="11002975" cy="685800"/>
-          </a:xfrm>
-          <a:prstGeom prst="rect">
-            <a:avLst/>
-          </a:prstGeom>
-          <a:noFill/>
-        </p:spPr>
-        <p:txBody>
-          <a:bodyPr wrap="square">
-            <a:spAutoFit/>
-          </a:bodyPr>
-          <a:lstStyle/>
-          <a:p>
-            <a:pPr algn="ctr"/>
-            <a:r>
-              <a:rPr sz="4400" b="1" i="0">
-                <a:solidFill>
-                  <a:srgbClr val="FFFFFF"/>
-                </a:solidFill>
-                <a:latin typeface="Arial"/>
-              </a:rPr>
-              <a:t>Vinde, adoremos</a:t>
+            <a:off x="640080" y="4128516"/>
+            <a:ext cx="10911535" cy="310896"/>
+          </a:xfrm>
+          <a:prstGeom prst="rect">
+            <a:avLst/>
+          </a:prstGeom>
+          <a:noFill/>
+        </p:spPr>
+        <p:txBody>
+          <a:bodyPr wrap="square">
+            <a:spAutoFit/>
+          </a:bodyPr>
+          <a:lstStyle/>
+          <a:p>
+            <a:pPr algn="ctr"/>
+            <a:r>
+              <a:rPr sz="2000" b="0" i="0">
+                <a:solidFill>
+                  <a:srgbClr val="828282"/>
+                </a:solidFill>
+                <a:latin typeface="Arial"/>
+              </a:rPr>
+              <a:t>ほめたたえ - よう</a:t>
             </a:r>
           </a:p>
         </p:txBody>
@@ -6427,29 +6217,29 @@
         </p:nvSpPr>
         <p:spPr>
           <a:xfrm>
-            <a:off x="594360" y="4251960"/>
-            <a:ext cx="11002975" cy="347472"/>
-          </a:xfrm>
-          <a:prstGeom prst="rect">
-            <a:avLst/>
-          </a:prstGeom>
-          <a:noFill/>
-        </p:spPr>
-        <p:txBody>
-          <a:bodyPr wrap="square">
-            <a:spAutoFit/>
-          </a:bodyPr>
-          <a:lstStyle/>
-          <a:p>
-            <a:pPr algn="ctr"/>
-            <a:r>
-              <a:rPr sz="2200" b="0" i="1">
-                <a:solidFill>
-                  <a:srgbClr val="8C8C8C"/>
-                </a:solidFill>
-                <a:latin typeface="Arial"/>
-              </a:rPr>
-              <a:t/>
+            <a:off x="640080" y="4494276"/>
+            <a:ext cx="10911535" cy="310896"/>
+          </a:xfrm>
+          <a:prstGeom prst="rect">
+            <a:avLst/>
+          </a:prstGeom>
+          <a:noFill/>
+        </p:spPr>
+        <p:txBody>
+          <a:bodyPr wrap="square">
+            <a:spAutoFit/>
+          </a:bodyPr>
+          <a:lstStyle/>
+          <a:p>
+            <a:pPr algn="ctr"/>
+            <a:r>
+              <a:rPr sz="2000" b="0" i="0">
+                <a:solidFill>
+                  <a:srgbClr val="828282"/>
+                </a:solidFill>
+                <a:latin typeface="Arial"/>
+              </a:rPr>
+              <a:t>見上げよう 神の御座  王なる主を</a:t>
             </a:r>
           </a:p>
         </p:txBody>
@@ -6488,23 +6278,23 @@
         </p:nvSpPr>
         <p:spPr>
           <a:xfrm>
-            <a:off x="594360" y="2258568"/>
-            <a:ext cx="11002975" cy="685800"/>
-          </a:xfrm>
-          <a:prstGeom prst="rect">
-            <a:avLst/>
-          </a:prstGeom>
-          <a:noFill/>
-        </p:spPr>
-        <p:txBody>
-          <a:bodyPr wrap="square">
-            <a:spAutoFit/>
-          </a:bodyPr>
-          <a:lstStyle/>
-          <a:p>
-            <a:pPr algn="ctr"/>
-            <a:r>
-              <a:rPr sz="4400" b="1" i="0">
+            <a:off x="640080" y="2052828"/>
+            <a:ext cx="10911535" cy="731520"/>
+          </a:xfrm>
+          <a:prstGeom prst="rect">
+            <a:avLst/>
+          </a:prstGeom>
+          <a:noFill/>
+        </p:spPr>
+        <p:txBody>
+          <a:bodyPr wrap="square">
+            <a:spAutoFit/>
+          </a:bodyPr>
+          <a:lstStyle/>
+          <a:p>
+            <a:pPr algn="ctr"/>
+            <a:r>
+              <a:rPr sz="4800" b="1" i="0">
                 <a:solidFill>
                   <a:srgbClr val="FFFFFF"/>
                 </a:solidFill>
@@ -6523,29 +6313,29 @@
         </p:nvSpPr>
         <p:spPr>
           <a:xfrm>
-            <a:off x="594360" y="2980944"/>
-            <a:ext cx="11002975" cy="347472"/>
-          </a:xfrm>
-          <a:prstGeom prst="rect">
-            <a:avLst/>
-          </a:prstGeom>
-          <a:noFill/>
-        </p:spPr>
-        <p:txBody>
-          <a:bodyPr wrap="square">
-            <a:spAutoFit/>
-          </a:bodyPr>
-          <a:lstStyle/>
-          <a:p>
-            <a:pPr algn="ctr"/>
-            <a:r>
-              <a:rPr sz="2200" b="0" i="1">
-                <a:solidFill>
-                  <a:srgbClr val="8C8C8C"/>
-                </a:solidFill>
-                <a:latin typeface="Arial"/>
-              </a:rPr>
-              <a:t/>
+            <a:off x="640080" y="2985516"/>
+            <a:ext cx="10911535" cy="731520"/>
+          </a:xfrm>
+          <a:prstGeom prst="rect">
+            <a:avLst/>
+          </a:prstGeom>
+          <a:noFill/>
+        </p:spPr>
+        <p:txBody>
+          <a:bodyPr wrap="square">
+            <a:spAutoFit/>
+          </a:bodyPr>
+          <a:lstStyle/>
+          <a:p>
+            <a:pPr algn="ctr"/>
+            <a:r>
+              <a:rPr sz="4800" b="1" i="0">
+                <a:solidFill>
+                  <a:srgbClr val="FFFFFF"/>
+                </a:solidFill>
+                <a:latin typeface="Arial"/>
+              </a:rPr>
+              <a:t>Quem como Ele cravejado foi?</a:t>
             </a:r>
           </a:p>
         </p:txBody>
@@ -6558,29 +6348,29 @@
         </p:nvSpPr>
         <p:spPr>
           <a:xfrm>
-            <a:off x="594360" y="3529584"/>
-            <a:ext cx="11002975" cy="685800"/>
-          </a:xfrm>
-          <a:prstGeom prst="rect">
-            <a:avLst/>
-          </a:prstGeom>
-          <a:noFill/>
-        </p:spPr>
-        <p:txBody>
-          <a:bodyPr wrap="square">
-            <a:spAutoFit/>
-          </a:bodyPr>
-          <a:lstStyle/>
-          <a:p>
-            <a:pPr algn="ctr"/>
-            <a:r>
-              <a:rPr sz="4400" b="1" i="0">
-                <a:solidFill>
-                  <a:srgbClr val="FFFFFF"/>
-                </a:solidFill>
-                <a:latin typeface="Arial"/>
-              </a:rPr>
-              <a:t>Quem como Ele cravejado foi?</a:t>
+            <a:off x="640080" y="4128516"/>
+            <a:ext cx="10911535" cy="310896"/>
+          </a:xfrm>
+          <a:prstGeom prst="rect">
+            <a:avLst/>
+          </a:prstGeom>
+          <a:noFill/>
+        </p:spPr>
+        <p:txBody>
+          <a:bodyPr wrap="square">
+            <a:spAutoFit/>
+          </a:bodyPr>
+          <a:lstStyle/>
+          <a:p>
+            <a:pPr algn="ctr"/>
+            <a:r>
+              <a:rPr sz="2000" b="0" i="0">
+                <a:solidFill>
+                  <a:srgbClr val="828282"/>
+                </a:solidFill>
+                <a:latin typeface="Arial"/>
+              </a:rPr>
+              <a:t>見上げよう イエスの御名</a:t>
             </a:r>
           </a:p>
         </p:txBody>
@@ -6593,29 +6383,29 @@
         </p:nvSpPr>
         <p:spPr>
           <a:xfrm>
-            <a:off x="594360" y="4251960"/>
-            <a:ext cx="11002975" cy="347472"/>
-          </a:xfrm>
-          <a:prstGeom prst="rect">
-            <a:avLst/>
-          </a:prstGeom>
-          <a:noFill/>
-        </p:spPr>
-        <p:txBody>
-          <a:bodyPr wrap="square">
-            <a:spAutoFit/>
-          </a:bodyPr>
-          <a:lstStyle/>
-          <a:p>
-            <a:pPr algn="ctr"/>
-            <a:r>
-              <a:rPr sz="2200" b="0" i="1">
-                <a:solidFill>
-                  <a:srgbClr val="8C8C8C"/>
-                </a:solidFill>
-                <a:latin typeface="Arial"/>
-              </a:rPr>
-              <a:t/>
+            <a:off x="640080" y="4494276"/>
+            <a:ext cx="10911535" cy="310896"/>
+          </a:xfrm>
+          <a:prstGeom prst="rect">
+            <a:avLst/>
+          </a:prstGeom>
+          <a:noFill/>
+        </p:spPr>
+        <p:txBody>
+          <a:bodyPr wrap="square">
+            <a:spAutoFit/>
+          </a:bodyPr>
+          <a:lstStyle/>
+          <a:p>
+            <a:pPr algn="ctr"/>
+            <a:r>
+              <a:rPr sz="2000" b="0" i="0">
+                <a:solidFill>
+                  <a:srgbClr val="828282"/>
+                </a:solidFill>
+                <a:latin typeface="Arial"/>
+              </a:rPr>
+              <a:t>ほめたたえ - よう</a:t>
             </a:r>
           </a:p>
         </p:txBody>
@@ -6654,23 +6444,23 @@
         </p:nvSpPr>
         <p:spPr>
           <a:xfrm>
-            <a:off x="594360" y="2258568"/>
-            <a:ext cx="11002975" cy="685800"/>
-          </a:xfrm>
-          <a:prstGeom prst="rect">
-            <a:avLst/>
-          </a:prstGeom>
-          <a:noFill/>
-        </p:spPr>
-        <p:txBody>
-          <a:bodyPr wrap="square">
-            <a:spAutoFit/>
-          </a:bodyPr>
-          <a:lstStyle/>
-          <a:p>
-            <a:pPr algn="ctr"/>
-            <a:r>
-              <a:rPr sz="4400" b="1" i="0">
+            <a:off x="640080" y="2052828"/>
+            <a:ext cx="10911535" cy="731520"/>
+          </a:xfrm>
+          <a:prstGeom prst="rect">
+            <a:avLst/>
+          </a:prstGeom>
+          <a:noFill/>
+        </p:spPr>
+        <p:txBody>
+          <a:bodyPr wrap="square">
+            <a:spAutoFit/>
+          </a:bodyPr>
+          <a:lstStyle/>
+          <a:p>
+            <a:pPr algn="ctr"/>
+            <a:r>
+              <a:rPr sz="4800" b="1" i="0">
                 <a:solidFill>
                   <a:srgbClr val="FFFFFF"/>
                 </a:solidFill>
@@ -6689,29 +6479,29 @@
         </p:nvSpPr>
         <p:spPr>
           <a:xfrm>
-            <a:off x="594360" y="2980944"/>
-            <a:ext cx="11002975" cy="347472"/>
-          </a:xfrm>
-          <a:prstGeom prst="rect">
-            <a:avLst/>
-          </a:prstGeom>
-          <a:noFill/>
-        </p:spPr>
-        <p:txBody>
-          <a:bodyPr wrap="square">
-            <a:spAutoFit/>
-          </a:bodyPr>
-          <a:lstStyle/>
-          <a:p>
-            <a:pPr algn="ctr"/>
-            <a:r>
-              <a:rPr sz="2200" b="0" i="1">
-                <a:solidFill>
-                  <a:srgbClr val="8C8C8C"/>
-                </a:solidFill>
-                <a:latin typeface="Arial"/>
-              </a:rPr>
-              <a:t/>
+            <a:off x="640080" y="2985516"/>
+            <a:ext cx="10911535" cy="731520"/>
+          </a:xfrm>
+          <a:prstGeom prst="rect">
+            <a:avLst/>
+          </a:prstGeom>
+          <a:noFill/>
+        </p:spPr>
+        <p:txBody>
+          <a:bodyPr wrap="square">
+            <a:spAutoFit/>
+          </a:bodyPr>
+          <a:lstStyle/>
+          <a:p>
+            <a:pPr algn="ctr"/>
+            <a:r>
+              <a:rPr sz="4800" b="1" i="0">
+                <a:solidFill>
+                  <a:srgbClr val="FFFFFF"/>
+                </a:solidFill>
+                <a:latin typeface="Arial"/>
+              </a:rPr>
+              <a:t>O servo Rei, que pra nós desceu</a:t>
             </a:r>
           </a:p>
         </p:txBody>
@@ -6724,29 +6514,29 @@
         </p:nvSpPr>
         <p:spPr>
           <a:xfrm>
-            <a:off x="594360" y="3529584"/>
-            <a:ext cx="11002975" cy="685800"/>
-          </a:xfrm>
-          <a:prstGeom prst="rect">
-            <a:avLst/>
-          </a:prstGeom>
-          <a:noFill/>
-        </p:spPr>
-        <p:txBody>
-          <a:bodyPr wrap="square">
-            <a:spAutoFit/>
-          </a:bodyPr>
-          <a:lstStyle/>
-          <a:p>
-            <a:pPr algn="ctr"/>
-            <a:r>
-              <a:rPr sz="4400" b="1" i="0">
-                <a:solidFill>
-                  <a:srgbClr val="FFFFFF"/>
-                </a:solidFill>
-                <a:latin typeface="Arial"/>
-              </a:rPr>
-              <a:t>O servo Rei, que pra nós desceu</a:t>
+            <a:off x="640080" y="4128516"/>
+            <a:ext cx="10911535" cy="310896"/>
+          </a:xfrm>
+          <a:prstGeom prst="rect">
+            <a:avLst/>
+          </a:prstGeom>
+          <a:noFill/>
+        </p:spPr>
+        <p:txBody>
+          <a:bodyPr wrap="square">
+            <a:spAutoFit/>
+          </a:bodyPr>
+          <a:lstStyle/>
+          <a:p>
+            <a:pPr algn="ctr"/>
+            <a:r>
+              <a:rPr sz="2000" b="0" i="0">
+                <a:solidFill>
+                  <a:srgbClr val="828282"/>
+                </a:solidFill>
+                <a:latin typeface="Arial"/>
+              </a:rPr>
+              <a:t>見上げよう 神の御座  王なる主を</a:t>
             </a:r>
           </a:p>
         </p:txBody>
@@ -6759,29 +6549,29 @@
         </p:nvSpPr>
         <p:spPr>
           <a:xfrm>
-            <a:off x="594360" y="4251960"/>
-            <a:ext cx="11002975" cy="347472"/>
-          </a:xfrm>
-          <a:prstGeom prst="rect">
-            <a:avLst/>
-          </a:prstGeom>
-          <a:noFill/>
-        </p:spPr>
-        <p:txBody>
-          <a:bodyPr wrap="square">
-            <a:spAutoFit/>
-          </a:bodyPr>
-          <a:lstStyle/>
-          <a:p>
-            <a:pPr algn="ctr"/>
-            <a:r>
-              <a:rPr sz="2200" b="0" i="1">
-                <a:solidFill>
-                  <a:srgbClr val="8C8C8C"/>
-                </a:solidFill>
-                <a:latin typeface="Arial"/>
-              </a:rPr>
-              <a:t/>
+            <a:off x="640080" y="4494276"/>
+            <a:ext cx="10911535" cy="310896"/>
+          </a:xfrm>
+          <a:prstGeom prst="rect">
+            <a:avLst/>
+          </a:prstGeom>
+          <a:noFill/>
+        </p:spPr>
+        <p:txBody>
+          <a:bodyPr wrap="square">
+            <a:spAutoFit/>
+          </a:bodyPr>
+          <a:lstStyle/>
+          <a:p>
+            <a:pPr algn="ctr"/>
+            <a:r>
+              <a:rPr sz="2000" b="0" i="0">
+                <a:solidFill>
+                  <a:srgbClr val="828282"/>
+                </a:solidFill>
+                <a:latin typeface="Arial"/>
+              </a:rPr>
+              <a:t>見上げよう イエスの御名</a:t>
             </a:r>
           </a:p>
         </p:txBody>

--- a/output_pptx/Behold_Our_God.pptx
+++ b/output_pptx/Behold_Our_God.pptx
@@ -4156,6 +4156,76 @@
           </a:p>
         </p:txBody>
       </p:sp>
+      <p:sp>
+        <p:nvSpPr>
+          <p:cNvPr id="4" name="TextBox 3"/>
+          <p:cNvSpPr txBox="1"/>
+          <p:nvPr/>
+        </p:nvSpPr>
+        <p:spPr>
+          <a:xfrm>
+            <a:off x="640080" y="4128516"/>
+            <a:ext cx="10911535" cy="310896"/>
+          </a:xfrm>
+          <a:prstGeom prst="rect">
+            <a:avLst/>
+          </a:prstGeom>
+          <a:noFill/>
+        </p:spPr>
+        <p:txBody>
+          <a:bodyPr wrap="square">
+            <a:spAutoFit/>
+          </a:bodyPr>
+          <a:lstStyle/>
+          <a:p>
+            <a:pPr algn="ctr"/>
+            <a:r>
+              <a:rPr sz="2000" b="0" i="0">
+                <a:solidFill>
+                  <a:srgbClr val="828282"/>
+                </a:solidFill>
+                <a:latin typeface="Arial"/>
+              </a:rPr>
+              <a:t>誰が主に助言を与えたか？</a:t>
+            </a:r>
+          </a:p>
+        </p:txBody>
+      </p:sp>
+      <p:sp>
+        <p:nvSpPr>
+          <p:cNvPr id="5" name="TextBox 4"/>
+          <p:cNvSpPr txBox="1"/>
+          <p:nvPr/>
+        </p:nvSpPr>
+        <p:spPr>
+          <a:xfrm>
+            <a:off x="640080" y="4494276"/>
+            <a:ext cx="10911535" cy="310896"/>
+          </a:xfrm>
+          <a:prstGeom prst="rect">
+            <a:avLst/>
+          </a:prstGeom>
+          <a:noFill/>
+        </p:spPr>
+        <p:txBody>
+          <a:bodyPr wrap="square">
+            <a:spAutoFit/>
+          </a:bodyPr>
+          <a:lstStyle/>
+          <a:p>
+            <a:pPr algn="ctr"/>
+            <a:r>
+              <a:rPr sz="2000" b="0" i="0">
+                <a:solidFill>
+                  <a:srgbClr val="828282"/>
+                </a:solidFill>
+                <a:latin typeface="Arial"/>
+              </a:rPr>
+              <a:t>誰が主を教えるのか？</a:t>
+            </a:r>
+          </a:p>
+        </p:txBody>
+      </p:sp>
     </p:spTree>
   </p:cSld>
   <p:clrMapOvr>
@@ -4252,6 +4322,76 @@
           </a:p>
         </p:txBody>
       </p:sp>
+      <p:sp>
+        <p:nvSpPr>
+          <p:cNvPr id="4" name="TextBox 3"/>
+          <p:cNvSpPr txBox="1"/>
+          <p:nvPr/>
+        </p:nvSpPr>
+        <p:spPr>
+          <a:xfrm>
+            <a:off x="640080" y="4128516"/>
+            <a:ext cx="10911535" cy="310896"/>
+          </a:xfrm>
+          <a:prstGeom prst="rect">
+            <a:avLst/>
+          </a:prstGeom>
+          <a:noFill/>
+        </p:spPr>
+        <p:txBody>
+          <a:bodyPr wrap="square">
+            <a:spAutoFit/>
+          </a:bodyPr>
+          <a:lstStyle/>
+          <a:p>
+            <a:pPr algn="ctr"/>
+            <a:r>
+              <a:rPr sz="2000" b="0" i="0">
+                <a:solidFill>
+                  <a:srgbClr val="828282"/>
+                </a:solidFill>
+                <a:latin typeface="Arial"/>
+              </a:rPr>
+              <a:t>見よ、我らの神、玉座で統治される</a:t>
+            </a:r>
+          </a:p>
+        </p:txBody>
+      </p:sp>
+      <p:sp>
+        <p:nvSpPr>
+          <p:cNvPr id="5" name="TextBox 4"/>
+          <p:cNvSpPr txBox="1"/>
+          <p:nvPr/>
+        </p:nvSpPr>
+        <p:spPr>
+          <a:xfrm>
+            <a:off x="640080" y="4494276"/>
+            <a:ext cx="10911535" cy="310896"/>
+          </a:xfrm>
+          <a:prstGeom prst="rect">
+            <a:avLst/>
+          </a:prstGeom>
+          <a:noFill/>
+        </p:spPr>
+        <p:txBody>
+          <a:bodyPr wrap="square">
+            <a:spAutoFit/>
+          </a:bodyPr>
+          <a:lstStyle/>
+          <a:p>
+            <a:pPr algn="ctr"/>
+            <a:r>
+              <a:rPr sz="2000" b="0" i="0">
+                <a:solidFill>
+                  <a:srgbClr val="828282"/>
+                </a:solidFill>
+                <a:latin typeface="Arial"/>
+              </a:rPr>
+              <a:t>見よ、我らの王よ、比べようなきほどに素晴らしい</a:t>
+            </a:r>
+          </a:p>
+        </p:txBody>
+      </p:sp>
     </p:spTree>
   </p:cSld>
   <p:clrMapOvr>
@@ -5908,6 +6048,76 @@
                 <a:latin typeface="Arial"/>
               </a:rPr>
               <a:t>Rejubila toda a criação</a:t>
+            </a:r>
+          </a:p>
+        </p:txBody>
+      </p:sp>
+      <p:sp>
+        <p:nvSpPr>
+          <p:cNvPr id="4" name="TextBox 3"/>
+          <p:cNvSpPr txBox="1"/>
+          <p:nvPr/>
+        </p:nvSpPr>
+        <p:spPr>
+          <a:xfrm>
+            <a:off x="640080" y="4128516"/>
+            <a:ext cx="10911535" cy="310896"/>
+          </a:xfrm>
+          <a:prstGeom prst="rect">
+            <a:avLst/>
+          </a:prstGeom>
+          <a:noFill/>
+        </p:spPr>
+        <p:txBody>
+          <a:bodyPr wrap="square">
+            <a:spAutoFit/>
+          </a:bodyPr>
+          <a:lstStyle/>
+          <a:p>
+            <a:pPr algn="ctr"/>
+            <a:r>
+              <a:rPr sz="2000" b="0" i="0">
+                <a:solidFill>
+                  <a:srgbClr val="828282"/>
+                </a:solidFill>
+                <a:latin typeface="Arial"/>
+              </a:rPr>
+              <a:t>王たちが、国々が、その声を聞いて震える</a:t>
+            </a:r>
+          </a:p>
+        </p:txBody>
+      </p:sp>
+      <p:sp>
+        <p:nvSpPr>
+          <p:cNvPr id="5" name="TextBox 4"/>
+          <p:cNvSpPr txBox="1"/>
+          <p:nvPr/>
+        </p:nvSpPr>
+        <p:spPr>
+          <a:xfrm>
+            <a:off x="640080" y="4494276"/>
+            <a:ext cx="10911535" cy="310896"/>
+          </a:xfrm>
+          <a:prstGeom prst="rect">
+            <a:avLst/>
+          </a:prstGeom>
+          <a:noFill/>
+        </p:spPr>
+        <p:txBody>
+          <a:bodyPr wrap="square">
+            <a:spAutoFit/>
+          </a:bodyPr>
+          <a:lstStyle/>
+          <a:p>
+            <a:pPr algn="ctr"/>
+            <a:r>
+              <a:rPr sz="2000" b="0" i="0">
+                <a:solidFill>
+                  <a:srgbClr val="828282"/>
+                </a:solidFill>
+                <a:latin typeface="Arial"/>
+              </a:rPr>
+              <a:t>すべての創造物が喜び踊る</a:t>
             </a:r>
           </a:p>
         </p:txBody>
